--- a/Lez2.pptx
+++ b/Lez2.pptx
@@ -6,7 +6,13 @@
   </p:sldMasterIdLst>
   <p:sldIdLst>
     <p:sldId id="256" r:id="rId2"/>
-    <p:sldId id="257" r:id="rId3"/>
+    <p:sldId id="259" r:id="rId3"/>
+    <p:sldId id="260" r:id="rId4"/>
+    <p:sldId id="261" r:id="rId5"/>
+    <p:sldId id="262" r:id="rId6"/>
+    <p:sldId id="263" r:id="rId7"/>
+    <p:sldId id="257" r:id="rId8"/>
+    <p:sldId id="258" r:id="rId9"/>
   </p:sldIdLst>
   <p:sldSz cx="12192000" cy="6858000"/>
   <p:notesSz cx="6858000" cy="9144000"/>
@@ -118,7 +124,7 @@
   <pc:docChgLst>
     <pc:chgData name="Alessandro Di Piazza" userId="242384fd-1746-4b70-8d90-c83f4330e5ed" providerId="ADAL" clId="{FFF1DA74-BEAE-470B-8D8A-B7A1F3E1BF85}"/>
     <pc:docChg chg="undo custSel addSld delSld modSld sldOrd">
-      <pc:chgData name="Alessandro Di Piazza" userId="242384fd-1746-4b70-8d90-c83f4330e5ed" providerId="ADAL" clId="{FFF1DA74-BEAE-470B-8D8A-B7A1F3E1BF85}" dt="2026-05-25T08:52:36.370" v="1197" actId="47"/>
+      <pc:chgData name="Alessandro Di Piazza" userId="242384fd-1746-4b70-8d90-c83f4330e5ed" providerId="ADAL" clId="{FFF1DA74-BEAE-470B-8D8A-B7A1F3E1BF85}" dt="2026-05-25T11:01:25.594" v="1549" actId="1076"/>
       <pc:docMkLst>
         <pc:docMk/>
       </pc:docMkLst>
@@ -231,6 +237,52 @@
           <pc:sldMk cId="3268373739" sldId="258"/>
         </pc:sldMkLst>
       </pc:sldChg>
+      <pc:sldChg chg="modSp new mod">
+        <pc:chgData name="Alessandro Di Piazza" userId="242384fd-1746-4b70-8d90-c83f4330e5ed" providerId="ADAL" clId="{FFF1DA74-BEAE-470B-8D8A-B7A1F3E1BF85}" dt="2026-05-25T10:50:40.263" v="1458" actId="20577"/>
+        <pc:sldMkLst>
+          <pc:docMk/>
+          <pc:sldMk cId="3630284680" sldId="258"/>
+        </pc:sldMkLst>
+        <pc:spChg chg="mod">
+          <ac:chgData name="Alessandro Di Piazza" userId="242384fd-1746-4b70-8d90-c83f4330e5ed" providerId="ADAL" clId="{FFF1DA74-BEAE-470B-8D8A-B7A1F3E1BF85}" dt="2026-05-25T08:58:10.711" v="1205" actId="20577"/>
+          <ac:spMkLst>
+            <pc:docMk/>
+            <pc:sldMk cId="3630284680" sldId="258"/>
+            <ac:spMk id="2" creationId="{DF9F321A-3DBB-2CEA-D316-61BA3B8C91F8}"/>
+          </ac:spMkLst>
+        </pc:spChg>
+        <pc:spChg chg="mod">
+          <ac:chgData name="Alessandro Di Piazza" userId="242384fd-1746-4b70-8d90-c83f4330e5ed" providerId="ADAL" clId="{FFF1DA74-BEAE-470B-8D8A-B7A1F3E1BF85}" dt="2026-05-25T10:50:40.263" v="1458" actId="20577"/>
+          <ac:spMkLst>
+            <pc:docMk/>
+            <pc:sldMk cId="3630284680" sldId="258"/>
+            <ac:spMk id="3" creationId="{144BDDAD-F2BA-5EC9-FC79-760DE859A970}"/>
+          </ac:spMkLst>
+        </pc:spChg>
+      </pc:sldChg>
+      <pc:sldChg chg="modSp new mod ord">
+        <pc:chgData name="Alessandro Di Piazza" userId="242384fd-1746-4b70-8d90-c83f4330e5ed" providerId="ADAL" clId="{FFF1DA74-BEAE-470B-8D8A-B7A1F3E1BF85}" dt="2026-05-25T10:55:46.977" v="1471" actId="14100"/>
+        <pc:sldMkLst>
+          <pc:docMk/>
+          <pc:sldMk cId="3918085652" sldId="259"/>
+        </pc:sldMkLst>
+        <pc:spChg chg="mod">
+          <ac:chgData name="Alessandro Di Piazza" userId="242384fd-1746-4b70-8d90-c83f4330e5ed" providerId="ADAL" clId="{FFF1DA74-BEAE-470B-8D8A-B7A1F3E1BF85}" dt="2026-05-25T10:55:23.334" v="1464" actId="20577"/>
+          <ac:spMkLst>
+            <pc:docMk/>
+            <pc:sldMk cId="3918085652" sldId="259"/>
+            <ac:spMk id="2" creationId="{5BB60F13-6B21-C692-DFB4-A08B2F27D440}"/>
+          </ac:spMkLst>
+        </pc:spChg>
+        <pc:spChg chg="mod">
+          <ac:chgData name="Alessandro Di Piazza" userId="242384fd-1746-4b70-8d90-c83f4330e5ed" providerId="ADAL" clId="{FFF1DA74-BEAE-470B-8D8A-B7A1F3E1BF85}" dt="2026-05-25T10:55:46.977" v="1471" actId="14100"/>
+          <ac:spMkLst>
+            <pc:docMk/>
+            <pc:sldMk cId="3918085652" sldId="259"/>
+            <ac:spMk id="3" creationId="{54D12C52-767C-3C5F-EBEA-E14CB33ED5F3}"/>
+          </ac:spMkLst>
+        </pc:spChg>
+      </pc:sldChg>
       <pc:sldChg chg="modSp new del mod">
         <pc:chgData name="Alessandro Di Piazza" userId="242384fd-1746-4b70-8d90-c83f4330e5ed" providerId="ADAL" clId="{FFF1DA74-BEAE-470B-8D8A-B7A1F3E1BF85}" dt="2026-05-25T08:52:28.998" v="1184" actId="47"/>
         <pc:sldMkLst>
@@ -238,12 +290,58 @@
           <pc:sldMk cId="4204095062" sldId="259"/>
         </pc:sldMkLst>
       </pc:sldChg>
+      <pc:sldChg chg="modSp new mod">
+        <pc:chgData name="Alessandro Di Piazza" userId="242384fd-1746-4b70-8d90-c83f4330e5ed" providerId="ADAL" clId="{FFF1DA74-BEAE-470B-8D8A-B7A1F3E1BF85}" dt="2026-05-25T10:57:03.580" v="1486" actId="2711"/>
+        <pc:sldMkLst>
+          <pc:docMk/>
+          <pc:sldMk cId="502201516" sldId="260"/>
+        </pc:sldMkLst>
+        <pc:spChg chg="mod">
+          <ac:chgData name="Alessandro Di Piazza" userId="242384fd-1746-4b70-8d90-c83f4330e5ed" providerId="ADAL" clId="{FFF1DA74-BEAE-470B-8D8A-B7A1F3E1BF85}" dt="2026-05-25T10:56:14.294" v="1473"/>
+          <ac:spMkLst>
+            <pc:docMk/>
+            <pc:sldMk cId="502201516" sldId="260"/>
+            <ac:spMk id="2" creationId="{62940D36-2CB6-A04E-D6E5-E8823DAD2142}"/>
+          </ac:spMkLst>
+        </pc:spChg>
+        <pc:spChg chg="mod">
+          <ac:chgData name="Alessandro Di Piazza" userId="242384fd-1746-4b70-8d90-c83f4330e5ed" providerId="ADAL" clId="{FFF1DA74-BEAE-470B-8D8A-B7A1F3E1BF85}" dt="2026-05-25T10:57:03.580" v="1486" actId="2711"/>
+          <ac:spMkLst>
+            <pc:docMk/>
+            <pc:sldMk cId="502201516" sldId="260"/>
+            <ac:spMk id="3" creationId="{C6D8125E-986E-CC15-4E2E-6288A060A113}"/>
+          </ac:spMkLst>
+        </pc:spChg>
+      </pc:sldChg>
       <pc:sldChg chg="addSp delSp modSp new del mod">
         <pc:chgData name="Alessandro Di Piazza" userId="242384fd-1746-4b70-8d90-c83f4330e5ed" providerId="ADAL" clId="{FFF1DA74-BEAE-470B-8D8A-B7A1F3E1BF85}" dt="2026-05-25T08:52:29.505" v="1185" actId="47"/>
         <pc:sldMkLst>
           <pc:docMk/>
           <pc:sldMk cId="3624749337" sldId="260"/>
         </pc:sldMkLst>
+      </pc:sldChg>
+      <pc:sldChg chg="modSp new mod ord">
+        <pc:chgData name="Alessandro Di Piazza" userId="242384fd-1746-4b70-8d90-c83f4330e5ed" providerId="ADAL" clId="{FFF1DA74-BEAE-470B-8D8A-B7A1F3E1BF85}" dt="2026-05-25T10:58:35.480" v="1506" actId="5793"/>
+        <pc:sldMkLst>
+          <pc:docMk/>
+          <pc:sldMk cId="689915869" sldId="261"/>
+        </pc:sldMkLst>
+        <pc:spChg chg="mod">
+          <ac:chgData name="Alessandro Di Piazza" userId="242384fd-1746-4b70-8d90-c83f4330e5ed" providerId="ADAL" clId="{FFF1DA74-BEAE-470B-8D8A-B7A1F3E1BF85}" dt="2026-05-25T10:57:15.605" v="1490"/>
+          <ac:spMkLst>
+            <pc:docMk/>
+            <pc:sldMk cId="689915869" sldId="261"/>
+            <ac:spMk id="2" creationId="{AD998BCE-01DE-CF18-1DBE-627827C7CD30}"/>
+          </ac:spMkLst>
+        </pc:spChg>
+        <pc:spChg chg="mod">
+          <ac:chgData name="Alessandro Di Piazza" userId="242384fd-1746-4b70-8d90-c83f4330e5ed" providerId="ADAL" clId="{FFF1DA74-BEAE-470B-8D8A-B7A1F3E1BF85}" dt="2026-05-25T10:58:35.480" v="1506" actId="5793"/>
+          <ac:spMkLst>
+            <pc:docMk/>
+            <pc:sldMk cId="689915869" sldId="261"/>
+            <ac:spMk id="3" creationId="{12136BC6-EA0A-E044-AF32-02FA492EE473}"/>
+          </ac:spMkLst>
+        </pc:spChg>
       </pc:sldChg>
       <pc:sldChg chg="modSp new del mod">
         <pc:chgData name="Alessandro Di Piazza" userId="242384fd-1746-4b70-8d90-c83f4330e5ed" providerId="ADAL" clId="{FFF1DA74-BEAE-470B-8D8A-B7A1F3E1BF85}" dt="2026-05-25T08:52:31.164" v="1186" actId="47"/>
@@ -259,12 +357,114 @@
           <pc:sldMk cId="2124150076" sldId="262"/>
         </pc:sldMkLst>
       </pc:sldChg>
+      <pc:sldChg chg="addSp delSp modSp new mod">
+        <pc:chgData name="Alessandro Di Piazza" userId="242384fd-1746-4b70-8d90-c83f4330e5ed" providerId="ADAL" clId="{FFF1DA74-BEAE-470B-8D8A-B7A1F3E1BF85}" dt="2026-05-25T11:00:00.303" v="1534" actId="14100"/>
+        <pc:sldMkLst>
+          <pc:docMk/>
+          <pc:sldMk cId="3061154852" sldId="262"/>
+        </pc:sldMkLst>
+        <pc:spChg chg="mod">
+          <ac:chgData name="Alessandro Di Piazza" userId="242384fd-1746-4b70-8d90-c83f4330e5ed" providerId="ADAL" clId="{FFF1DA74-BEAE-470B-8D8A-B7A1F3E1BF85}" dt="2026-05-25T10:58:51.769" v="1508"/>
+          <ac:spMkLst>
+            <pc:docMk/>
+            <pc:sldMk cId="3061154852" sldId="262"/>
+            <ac:spMk id="2" creationId="{5B7F4919-26F3-6CD5-4424-1878568FBEF2}"/>
+          </ac:spMkLst>
+        </pc:spChg>
+        <pc:spChg chg="mod">
+          <ac:chgData name="Alessandro Di Piazza" userId="242384fd-1746-4b70-8d90-c83f4330e5ed" providerId="ADAL" clId="{FFF1DA74-BEAE-470B-8D8A-B7A1F3E1BF85}" dt="2026-05-25T11:00:00.303" v="1534" actId="14100"/>
+          <ac:spMkLst>
+            <pc:docMk/>
+            <pc:sldMk cId="3061154852" sldId="262"/>
+            <ac:spMk id="3" creationId="{7DBD14B4-C920-6A74-E0D5-3FF79EF6DE1D}"/>
+          </ac:spMkLst>
+        </pc:spChg>
+        <pc:spChg chg="add del">
+          <ac:chgData name="Alessandro Di Piazza" userId="242384fd-1746-4b70-8d90-c83f4330e5ed" providerId="ADAL" clId="{FFF1DA74-BEAE-470B-8D8A-B7A1F3E1BF85}" dt="2026-05-25T10:59:38.962" v="1524" actId="22"/>
+          <ac:spMkLst>
+            <pc:docMk/>
+            <pc:sldMk cId="3061154852" sldId="262"/>
+            <ac:spMk id="5" creationId="{FF942901-F941-8512-709C-7CFC5F4DDA1F}"/>
+          </ac:spMkLst>
+        </pc:spChg>
+        <pc:spChg chg="add mod">
+          <ac:chgData name="Alessandro Di Piazza" userId="242384fd-1746-4b70-8d90-c83f4330e5ed" providerId="ADAL" clId="{FFF1DA74-BEAE-470B-8D8A-B7A1F3E1BF85}" dt="2026-05-25T10:59:50.691" v="1527" actId="14100"/>
+          <ac:spMkLst>
+            <pc:docMk/>
+            <pc:sldMk cId="3061154852" sldId="262"/>
+            <ac:spMk id="7" creationId="{5838E58F-F3FF-F687-8899-F95C6504EAE0}"/>
+          </ac:spMkLst>
+        </pc:spChg>
+      </pc:sldChg>
       <pc:sldChg chg="addSp delSp modSp new del mod">
         <pc:chgData name="Alessandro Di Piazza" userId="242384fd-1746-4b70-8d90-c83f4330e5ed" providerId="ADAL" clId="{FFF1DA74-BEAE-470B-8D8A-B7A1F3E1BF85}" dt="2026-05-25T08:52:31.910" v="1188" actId="47"/>
         <pc:sldMkLst>
           <pc:docMk/>
           <pc:sldMk cId="2620022595" sldId="263"/>
         </pc:sldMkLst>
+      </pc:sldChg>
+      <pc:sldChg chg="addSp delSp modSp new mod">
+        <pc:chgData name="Alessandro Di Piazza" userId="242384fd-1746-4b70-8d90-c83f4330e5ed" providerId="ADAL" clId="{FFF1DA74-BEAE-470B-8D8A-B7A1F3E1BF85}" dt="2026-05-25T11:01:25.594" v="1549" actId="1076"/>
+        <pc:sldMkLst>
+          <pc:docMk/>
+          <pc:sldMk cId="2660867481" sldId="263"/>
+        </pc:sldMkLst>
+        <pc:spChg chg="mod">
+          <ac:chgData name="Alessandro Di Piazza" userId="242384fd-1746-4b70-8d90-c83f4330e5ed" providerId="ADAL" clId="{FFF1DA74-BEAE-470B-8D8A-B7A1F3E1BF85}" dt="2026-05-25T11:00:33.387" v="1540" actId="20577"/>
+          <ac:spMkLst>
+            <pc:docMk/>
+            <pc:sldMk cId="2660867481" sldId="263"/>
+            <ac:spMk id="2" creationId="{65BE7D12-AA33-7C95-0F78-CD2328B1F26E}"/>
+          </ac:spMkLst>
+        </pc:spChg>
+        <pc:spChg chg="del mod">
+          <ac:chgData name="Alessandro Di Piazza" userId="242384fd-1746-4b70-8d90-c83f4330e5ed" providerId="ADAL" clId="{FFF1DA74-BEAE-470B-8D8A-B7A1F3E1BF85}" dt="2026-05-25T11:00:23.979" v="1536" actId="478"/>
+          <ac:spMkLst>
+            <pc:docMk/>
+            <pc:sldMk cId="2660867481" sldId="263"/>
+            <ac:spMk id="3" creationId="{5A566662-DC42-EFF5-77E1-F216CF1BAABD}"/>
+          </ac:spMkLst>
+        </pc:spChg>
+        <pc:spChg chg="add del mod">
+          <ac:chgData name="Alessandro Di Piazza" userId="242384fd-1746-4b70-8d90-c83f4330e5ed" providerId="ADAL" clId="{FFF1DA74-BEAE-470B-8D8A-B7A1F3E1BF85}" dt="2026-05-25T11:00:35.985" v="1541" actId="478"/>
+          <ac:spMkLst>
+            <pc:docMk/>
+            <pc:sldMk cId="2660867481" sldId="263"/>
+            <ac:spMk id="5" creationId="{5EDC39F9-A0E5-B661-B43D-BFC071EACE66}"/>
+          </ac:spMkLst>
+        </pc:spChg>
+        <pc:spChg chg="add mod">
+          <ac:chgData name="Alessandro Di Piazza" userId="242384fd-1746-4b70-8d90-c83f4330e5ed" providerId="ADAL" clId="{FFF1DA74-BEAE-470B-8D8A-B7A1F3E1BF85}" dt="2026-05-25T11:00:43.701" v="1543" actId="1076"/>
+          <ac:spMkLst>
+            <pc:docMk/>
+            <pc:sldMk cId="2660867481" sldId="263"/>
+            <ac:spMk id="7" creationId="{0F9FC87B-6D3C-11F4-F587-9A6C5D4472D4}"/>
+          </ac:spMkLst>
+        </pc:spChg>
+        <pc:spChg chg="add mod">
+          <ac:chgData name="Alessandro Di Piazza" userId="242384fd-1746-4b70-8d90-c83f4330e5ed" providerId="ADAL" clId="{FFF1DA74-BEAE-470B-8D8A-B7A1F3E1BF85}" dt="2026-05-25T11:00:55.011" v="1545" actId="1076"/>
+          <ac:spMkLst>
+            <pc:docMk/>
+            <pc:sldMk cId="2660867481" sldId="263"/>
+            <ac:spMk id="9" creationId="{95AF15A6-B6DC-A027-21D4-CF07EA9D109E}"/>
+          </ac:spMkLst>
+        </pc:spChg>
+        <pc:spChg chg="add mod">
+          <ac:chgData name="Alessandro Di Piazza" userId="242384fd-1746-4b70-8d90-c83f4330e5ed" providerId="ADAL" clId="{FFF1DA74-BEAE-470B-8D8A-B7A1F3E1BF85}" dt="2026-05-25T11:01:02.044" v="1547" actId="1076"/>
+          <ac:spMkLst>
+            <pc:docMk/>
+            <pc:sldMk cId="2660867481" sldId="263"/>
+            <ac:spMk id="11" creationId="{DBFC8F4C-A4AE-C3C8-4EA2-B6829EA9F695}"/>
+          </ac:spMkLst>
+        </pc:spChg>
+        <pc:spChg chg="add mod">
+          <ac:chgData name="Alessandro Di Piazza" userId="242384fd-1746-4b70-8d90-c83f4330e5ed" providerId="ADAL" clId="{FFF1DA74-BEAE-470B-8D8A-B7A1F3E1BF85}" dt="2026-05-25T11:01:25.594" v="1549" actId="1076"/>
+          <ac:spMkLst>
+            <pc:docMk/>
+            <pc:sldMk cId="2660867481" sldId="263"/>
+            <ac:spMk id="13" creationId="{71238293-F274-D725-7903-D35D8FD4D2C0}"/>
+          </ac:spMkLst>
+        </pc:spChg>
       </pc:sldChg>
       <pc:sldChg chg="modSp new del mod">
         <pc:chgData name="Alessandro Di Piazza" userId="242384fd-1746-4b70-8d90-c83f4330e5ed" providerId="ADAL" clId="{FFF1DA74-BEAE-470B-8D8A-B7A1F3E1BF85}" dt="2026-05-25T08:52:32.299" v="1189" actId="47"/>
@@ -3705,6 +3905,1247 @@
           <p:cNvPr id="2" name="Title 1">
             <a:extLst>
               <a:ext uri="{FF2B5EF4-FFF2-40B4-BE49-F238E27FC236}">
+                <a16:creationId xmlns:a16="http://schemas.microsoft.com/office/drawing/2014/main" id="{5BB60F13-6B21-C692-DFB4-A08B2F27D440}"/>
+              </a:ext>
+            </a:extLst>
+          </p:cNvPr>
+          <p:cNvSpPr>
+            <a:spLocks noGrp="1"/>
+          </p:cNvSpPr>
+          <p:nvPr>
+            <p:ph type="title"/>
+          </p:nvPr>
+        </p:nvSpPr>
+        <p:spPr/>
+        <p:txBody>
+          <a:bodyPr/>
+          <a:lstStyle/>
+          <a:p>
+            <a:r>
+              <a:rPr lang="en-US" dirty="0"/>
+              <a:t>Pip</a:t>
+            </a:r>
+          </a:p>
+        </p:txBody>
+      </p:sp>
+      <p:sp>
+        <p:nvSpPr>
+          <p:cNvPr id="3" name="Content Placeholder 2">
+            <a:extLst>
+              <a:ext uri="{FF2B5EF4-FFF2-40B4-BE49-F238E27FC236}">
+                <a16:creationId xmlns:a16="http://schemas.microsoft.com/office/drawing/2014/main" id="{54D12C52-767C-3C5F-EBEA-E14CB33ED5F3}"/>
+              </a:ext>
+            </a:extLst>
+          </p:cNvPr>
+          <p:cNvSpPr>
+            <a:spLocks noGrp="1"/>
+          </p:cNvSpPr>
+          <p:nvPr>
+            <p:ph idx="1"/>
+          </p:nvPr>
+        </p:nvSpPr>
+        <p:spPr>
+          <a:xfrm>
+            <a:off x="838200" y="1825625"/>
+            <a:ext cx="4890247" cy="4351338"/>
+          </a:xfrm>
+        </p:spPr>
+        <p:txBody>
+          <a:bodyPr/>
+          <a:lstStyle/>
+          <a:p>
+            <a:pPr marL="0" indent="0">
+              <a:buNone/>
+            </a:pPr>
+            <a:r>
+              <a:rPr lang="it-IT" b="1" dirty="0"/>
+              <a:t>Cos’è pip</a:t>
+            </a:r>
+          </a:p>
+          <a:p>
+            <a:r>
+              <a:rPr lang="it-IT" dirty="0"/>
+              <a:t>pip è lo strumento usato per:</a:t>
+            </a:r>
+          </a:p>
+          <a:p>
+            <a:r>
+              <a:rPr lang="it-IT" dirty="0"/>
+              <a:t>installare librerie Python </a:t>
+            </a:r>
+          </a:p>
+          <a:p>
+            <a:r>
+              <a:rPr lang="it-IT" dirty="0"/>
+              <a:t>aggiornare pacchetti </a:t>
+            </a:r>
+          </a:p>
+          <a:p>
+            <a:r>
+              <a:rPr lang="it-IT" dirty="0"/>
+              <a:t>rimuovere dipendenze </a:t>
+            </a:r>
+          </a:p>
+          <a:p>
+            <a:r>
+              <a:rPr lang="it-IT" dirty="0"/>
+              <a:t>gestire librerie esterne</a:t>
+            </a:r>
+          </a:p>
+          <a:p>
+            <a:endParaRPr lang="en-US" dirty="0"/>
+          </a:p>
+        </p:txBody>
+      </p:sp>
+    </p:spTree>
+    <p:extLst>
+      <p:ext uri="{BB962C8B-B14F-4D97-AF65-F5344CB8AC3E}">
+        <p14:creationId xmlns:p14="http://schemas.microsoft.com/office/powerpoint/2010/main" val="3918085652"/>
+      </p:ext>
+    </p:extLst>
+  </p:cSld>
+  <p:clrMapOvr>
+    <a:masterClrMapping/>
+  </p:clrMapOvr>
+</p:sld>
+</file>
+
+<file path=ppt/slides/slide3.xml><?xml version="1.0" encoding="utf-8"?>
+<p:sld xmlns:a="http://schemas.openxmlformats.org/drawingml/2006/main" xmlns:r="http://schemas.openxmlformats.org/officeDocument/2006/relationships" xmlns:p="http://schemas.openxmlformats.org/presentationml/2006/main">
+  <p:cSld>
+    <p:spTree>
+      <p:nvGrpSpPr>
+        <p:cNvPr id="1" name=""/>
+        <p:cNvGrpSpPr/>
+        <p:nvPr/>
+      </p:nvGrpSpPr>
+      <p:grpSpPr>
+        <a:xfrm>
+          <a:off x="0" y="0"/>
+          <a:ext cx="0" cy="0"/>
+          <a:chOff x="0" y="0"/>
+          <a:chExt cx="0" cy="0"/>
+        </a:xfrm>
+      </p:grpSpPr>
+      <p:sp>
+        <p:nvSpPr>
+          <p:cNvPr id="2" name="Title 1">
+            <a:extLst>
+              <a:ext uri="{FF2B5EF4-FFF2-40B4-BE49-F238E27FC236}">
+                <a16:creationId xmlns:a16="http://schemas.microsoft.com/office/drawing/2014/main" id="{62940D36-2CB6-A04E-D6E5-E8823DAD2142}"/>
+              </a:ext>
+            </a:extLst>
+          </p:cNvPr>
+          <p:cNvSpPr>
+            <a:spLocks noGrp="1"/>
+          </p:cNvSpPr>
+          <p:nvPr>
+            <p:ph type="title"/>
+          </p:nvPr>
+        </p:nvSpPr>
+        <p:spPr/>
+        <p:txBody>
+          <a:bodyPr/>
+          <a:lstStyle/>
+          <a:p>
+            <a:r>
+              <a:rPr lang="en-US" dirty="0" err="1"/>
+              <a:t>Esempi</a:t>
+            </a:r>
+            <a:endParaRPr lang="en-US" dirty="0"/>
+          </a:p>
+        </p:txBody>
+      </p:sp>
+      <p:sp>
+        <p:nvSpPr>
+          <p:cNvPr id="3" name="Content Placeholder 2">
+            <a:extLst>
+              <a:ext uri="{FF2B5EF4-FFF2-40B4-BE49-F238E27FC236}">
+                <a16:creationId xmlns:a16="http://schemas.microsoft.com/office/drawing/2014/main" id="{C6D8125E-986E-CC15-4E2E-6288A060A113}"/>
+              </a:ext>
+            </a:extLst>
+          </p:cNvPr>
+          <p:cNvSpPr>
+            <a:spLocks noGrp="1"/>
+          </p:cNvSpPr>
+          <p:nvPr>
+            <p:ph idx="1"/>
+          </p:nvPr>
+        </p:nvSpPr>
+        <p:spPr/>
+        <p:txBody>
+          <a:bodyPr/>
+          <a:lstStyle/>
+          <a:p>
+            <a:r>
+              <a:rPr lang="en-US" b="1" dirty="0" err="1"/>
+              <a:t>Installare</a:t>
+            </a:r>
+            <a:r>
+              <a:rPr lang="en-US" b="1" dirty="0"/>
+              <a:t> </a:t>
+            </a:r>
+            <a:r>
+              <a:rPr lang="en-US" b="1" dirty="0" err="1"/>
+              <a:t>una</a:t>
+            </a:r>
+            <a:r>
+              <a:rPr lang="en-US" b="1" dirty="0"/>
+              <a:t> </a:t>
+            </a:r>
+            <a:r>
+              <a:rPr lang="en-US" b="1" dirty="0" err="1"/>
+              <a:t>libreria</a:t>
+            </a:r>
+            <a:endParaRPr lang="en-US" b="1" dirty="0"/>
+          </a:p>
+          <a:p>
+            <a:pPr marL="0" indent="0">
+              <a:buNone/>
+            </a:pPr>
+            <a:r>
+              <a:rPr lang="en-US" dirty="0">
+                <a:latin typeface="Consolas" panose="020B0609020204030204" pitchFamily="49" charset="0"/>
+              </a:rPr>
+              <a:t>	pip install requests</a:t>
+            </a:r>
+          </a:p>
+          <a:p>
+            <a:r>
+              <a:rPr lang="en-US" b="1" dirty="0" err="1"/>
+              <a:t>Aggiornare</a:t>
+            </a:r>
+            <a:r>
+              <a:rPr lang="en-US" b="1" dirty="0"/>
+              <a:t> </a:t>
+            </a:r>
+            <a:r>
+              <a:rPr lang="en-US" b="1" dirty="0" err="1"/>
+              <a:t>una</a:t>
+            </a:r>
+            <a:r>
+              <a:rPr lang="en-US" b="1" dirty="0"/>
+              <a:t> </a:t>
+            </a:r>
+            <a:r>
+              <a:rPr lang="en-US" b="1" dirty="0" err="1"/>
+              <a:t>libreria</a:t>
+            </a:r>
+            <a:endParaRPr lang="en-US" b="1" dirty="0"/>
+          </a:p>
+          <a:p>
+            <a:pPr marL="0" indent="0">
+              <a:buNone/>
+            </a:pPr>
+            <a:r>
+              <a:rPr lang="en-US" dirty="0">
+                <a:latin typeface="Consolas" panose="020B0609020204030204" pitchFamily="49" charset="0"/>
+              </a:rPr>
+              <a:t>	pip install --upgrade requests</a:t>
+            </a:r>
+          </a:p>
+          <a:p>
+            <a:r>
+              <a:rPr lang="en-US" b="1" dirty="0" err="1"/>
+              <a:t>Rimuovere</a:t>
+            </a:r>
+            <a:r>
+              <a:rPr lang="en-US" b="1" dirty="0"/>
+              <a:t> </a:t>
+            </a:r>
+            <a:r>
+              <a:rPr lang="en-US" b="1" dirty="0" err="1"/>
+              <a:t>una</a:t>
+            </a:r>
+            <a:r>
+              <a:rPr lang="en-US" b="1" dirty="0"/>
+              <a:t> </a:t>
+            </a:r>
+            <a:r>
+              <a:rPr lang="en-US" b="1" dirty="0" err="1"/>
+              <a:t>libreria</a:t>
+            </a:r>
+            <a:endParaRPr lang="en-US" b="1" dirty="0"/>
+          </a:p>
+          <a:p>
+            <a:pPr marL="0" indent="0">
+              <a:buNone/>
+            </a:pPr>
+            <a:r>
+              <a:rPr lang="en-US" dirty="0">
+                <a:latin typeface="Consolas" panose="020B0609020204030204" pitchFamily="49" charset="0"/>
+              </a:rPr>
+              <a:t>	pip uninstall requests</a:t>
+            </a:r>
+          </a:p>
+          <a:p>
+            <a:r>
+              <a:rPr lang="en-US" b="1" dirty="0"/>
+              <a:t>Vedere </a:t>
+            </a:r>
+            <a:r>
+              <a:rPr lang="en-US" b="1" dirty="0" err="1"/>
+              <a:t>librerie</a:t>
+            </a:r>
+            <a:r>
+              <a:rPr lang="en-US" b="1" dirty="0"/>
+              <a:t> </a:t>
+            </a:r>
+            <a:r>
+              <a:rPr lang="en-US" b="1" dirty="0" err="1"/>
+              <a:t>installate</a:t>
+            </a:r>
+            <a:endParaRPr lang="en-US" b="1" dirty="0"/>
+          </a:p>
+          <a:p>
+            <a:pPr marL="0" indent="0">
+              <a:buNone/>
+            </a:pPr>
+            <a:r>
+              <a:rPr lang="en-US" dirty="0">
+                <a:latin typeface="Consolas" panose="020B0609020204030204" pitchFamily="49" charset="0"/>
+              </a:rPr>
+              <a:t>	pip list</a:t>
+            </a:r>
+          </a:p>
+          <a:p>
+            <a:endParaRPr lang="en-US" dirty="0"/>
+          </a:p>
+        </p:txBody>
+      </p:sp>
+    </p:spTree>
+    <p:extLst>
+      <p:ext uri="{BB962C8B-B14F-4D97-AF65-F5344CB8AC3E}">
+        <p14:creationId xmlns:p14="http://schemas.microsoft.com/office/powerpoint/2010/main" val="502201516"/>
+      </p:ext>
+    </p:extLst>
+  </p:cSld>
+  <p:clrMapOvr>
+    <a:masterClrMapping/>
+  </p:clrMapOvr>
+</p:sld>
+</file>
+
+<file path=ppt/slides/slide4.xml><?xml version="1.0" encoding="utf-8"?>
+<p:sld xmlns:a="http://schemas.openxmlformats.org/drawingml/2006/main" xmlns:r="http://schemas.openxmlformats.org/officeDocument/2006/relationships" xmlns:p="http://schemas.openxmlformats.org/presentationml/2006/main">
+  <p:cSld>
+    <p:spTree>
+      <p:nvGrpSpPr>
+        <p:cNvPr id="1" name=""/>
+        <p:cNvGrpSpPr/>
+        <p:nvPr/>
+      </p:nvGrpSpPr>
+      <p:grpSpPr>
+        <a:xfrm>
+          <a:off x="0" y="0"/>
+          <a:ext cx="0" cy="0"/>
+          <a:chOff x="0" y="0"/>
+          <a:chExt cx="0" cy="0"/>
+        </a:xfrm>
+      </p:grpSpPr>
+      <p:sp>
+        <p:nvSpPr>
+          <p:cNvPr id="2" name="Title 1">
+            <a:extLst>
+              <a:ext uri="{FF2B5EF4-FFF2-40B4-BE49-F238E27FC236}">
+                <a16:creationId xmlns:a16="http://schemas.microsoft.com/office/drawing/2014/main" id="{AD998BCE-01DE-CF18-1DBE-627827C7CD30}"/>
+              </a:ext>
+            </a:extLst>
+          </p:cNvPr>
+          <p:cNvSpPr>
+            <a:spLocks noGrp="1"/>
+          </p:cNvSpPr>
+          <p:nvPr>
+            <p:ph type="title"/>
+          </p:nvPr>
+        </p:nvSpPr>
+        <p:spPr/>
+        <p:txBody>
+          <a:bodyPr/>
+          <a:lstStyle/>
+          <a:p>
+            <a:r>
+              <a:rPr lang="en-US" dirty="0"/>
+              <a:t>File requirements.txt</a:t>
+            </a:r>
+          </a:p>
+        </p:txBody>
+      </p:sp>
+      <p:sp>
+        <p:nvSpPr>
+          <p:cNvPr id="3" name="Content Placeholder 2">
+            <a:extLst>
+              <a:ext uri="{FF2B5EF4-FFF2-40B4-BE49-F238E27FC236}">
+                <a16:creationId xmlns:a16="http://schemas.microsoft.com/office/drawing/2014/main" id="{12136BC6-EA0A-E044-AF32-02FA492EE473}"/>
+              </a:ext>
+            </a:extLst>
+          </p:cNvPr>
+          <p:cNvSpPr>
+            <a:spLocks noGrp="1"/>
+          </p:cNvSpPr>
+          <p:nvPr>
+            <p:ph idx="1"/>
+          </p:nvPr>
+        </p:nvSpPr>
+        <p:spPr/>
+        <p:txBody>
+          <a:bodyPr>
+            <a:normAutofit/>
+          </a:bodyPr>
+          <a:lstStyle/>
+          <a:p>
+            <a:pPr marL="0" indent="0">
+              <a:buNone/>
+            </a:pPr>
+            <a:r>
+              <a:rPr lang="en-US" b="1" dirty="0" err="1"/>
+              <a:t>Generare</a:t>
+            </a:r>
+            <a:r>
+              <a:rPr lang="en-US" b="1" dirty="0"/>
+              <a:t> requirements.txt</a:t>
+            </a:r>
+          </a:p>
+          <a:p>
+            <a:pPr marL="0" indent="0">
+              <a:buNone/>
+            </a:pPr>
+            <a:r>
+              <a:rPr lang="en-US" dirty="0"/>
+              <a:t>	</a:t>
+            </a:r>
+            <a:r>
+              <a:rPr lang="en-US" dirty="0">
+                <a:latin typeface="Consolas" panose="020B0609020204030204" pitchFamily="49" charset="0"/>
+              </a:rPr>
+              <a:t>pip freeze &gt; requirements.txt</a:t>
+            </a:r>
+          </a:p>
+          <a:p>
+            <a:pPr marL="0" indent="0">
+              <a:buNone/>
+            </a:pPr>
+            <a:r>
+              <a:rPr lang="en-US" b="1" dirty="0" err="1"/>
+              <a:t>Installare</a:t>
+            </a:r>
+            <a:r>
+              <a:rPr lang="en-US" b="1" dirty="0"/>
+              <a:t> da file</a:t>
+            </a:r>
+          </a:p>
+          <a:p>
+            <a:pPr marL="0" indent="0">
+              <a:buNone/>
+            </a:pPr>
+            <a:r>
+              <a:rPr lang="en-US" dirty="0"/>
+              <a:t>	</a:t>
+            </a:r>
+            <a:r>
+              <a:rPr lang="en-US" dirty="0">
+                <a:latin typeface="Consolas" panose="020B0609020204030204" pitchFamily="49" charset="0"/>
+              </a:rPr>
+              <a:t>pip install -r requirements.txt</a:t>
+            </a:r>
+            <a:br>
+              <a:rPr lang="en-US" dirty="0"/>
+            </a:br>
+            <a:endParaRPr lang="en-US" dirty="0"/>
+          </a:p>
+          <a:p>
+            <a:pPr marL="0" indent="0">
+              <a:buNone/>
+            </a:pPr>
+            <a:r>
+              <a:rPr lang="en-US" dirty="0"/>
+              <a:t>pip </a:t>
+            </a:r>
+            <a:r>
+              <a:rPr lang="en-US" dirty="0" err="1"/>
+              <a:t>installa</a:t>
+            </a:r>
+            <a:r>
+              <a:rPr lang="en-US" dirty="0"/>
+              <a:t> </a:t>
+            </a:r>
+            <a:r>
+              <a:rPr lang="en-US" dirty="0" err="1"/>
+              <a:t>pacchetti</a:t>
+            </a:r>
+            <a:r>
+              <a:rPr lang="en-US" dirty="0"/>
+              <a:t> dal repository </a:t>
+            </a:r>
+            <a:r>
+              <a:rPr lang="en-US" dirty="0" err="1"/>
+              <a:t>ufficiale</a:t>
+            </a:r>
+            <a:r>
+              <a:rPr lang="en-US" dirty="0"/>
+              <a:t> Python:</a:t>
+            </a:r>
+          </a:p>
+          <a:p>
+            <a:pPr marL="0" indent="0">
+              <a:buNone/>
+            </a:pPr>
+            <a:r>
+              <a:rPr lang="en-US" b="1" dirty="0" err="1">
+                <a:hlinkClick r:id="rId2"/>
+              </a:rPr>
+              <a:t>PyPI</a:t>
+            </a:r>
+            <a:r>
+              <a:rPr lang="en-US" b="1" dirty="0">
+                <a:hlinkClick r:id="rId2"/>
+              </a:rPr>
+              <a:t> (Python Package Index)</a:t>
+            </a:r>
+            <a:endParaRPr lang="en-US" b="1" dirty="0"/>
+          </a:p>
+          <a:p>
+            <a:endParaRPr lang="en-US" dirty="0"/>
+          </a:p>
+        </p:txBody>
+      </p:sp>
+    </p:spTree>
+    <p:extLst>
+      <p:ext uri="{BB962C8B-B14F-4D97-AF65-F5344CB8AC3E}">
+        <p14:creationId xmlns:p14="http://schemas.microsoft.com/office/powerpoint/2010/main" val="689915869"/>
+      </p:ext>
+    </p:extLst>
+  </p:cSld>
+  <p:clrMapOvr>
+    <a:masterClrMapping/>
+  </p:clrMapOvr>
+</p:sld>
+</file>
+
+<file path=ppt/slides/slide5.xml><?xml version="1.0" encoding="utf-8"?>
+<p:sld xmlns:a="http://schemas.openxmlformats.org/drawingml/2006/main" xmlns:r="http://schemas.openxmlformats.org/officeDocument/2006/relationships" xmlns:p="http://schemas.openxmlformats.org/presentationml/2006/main">
+  <p:cSld>
+    <p:spTree>
+      <p:nvGrpSpPr>
+        <p:cNvPr id="1" name=""/>
+        <p:cNvGrpSpPr/>
+        <p:nvPr/>
+      </p:nvGrpSpPr>
+      <p:grpSpPr>
+        <a:xfrm>
+          <a:off x="0" y="0"/>
+          <a:ext cx="0" cy="0"/>
+          <a:chOff x="0" y="0"/>
+          <a:chExt cx="0" cy="0"/>
+        </a:xfrm>
+      </p:grpSpPr>
+      <p:sp>
+        <p:nvSpPr>
+          <p:cNvPr id="2" name="Title 1">
+            <a:extLst>
+              <a:ext uri="{FF2B5EF4-FFF2-40B4-BE49-F238E27FC236}">
+                <a16:creationId xmlns:a16="http://schemas.microsoft.com/office/drawing/2014/main" id="{5B7F4919-26F3-6CD5-4424-1878568FBEF2}"/>
+              </a:ext>
+            </a:extLst>
+          </p:cNvPr>
+          <p:cNvSpPr>
+            <a:spLocks noGrp="1"/>
+          </p:cNvSpPr>
+          <p:nvPr>
+            <p:ph type="title"/>
+          </p:nvPr>
+        </p:nvSpPr>
+        <p:spPr/>
+        <p:txBody>
+          <a:bodyPr/>
+          <a:lstStyle/>
+          <a:p>
+            <a:r>
+              <a:rPr lang="en-US" dirty="0" err="1"/>
+              <a:t>venv</a:t>
+            </a:r>
+            <a:r>
+              <a:rPr lang="en-US" dirty="0"/>
+              <a:t>: </a:t>
+            </a:r>
+            <a:r>
+              <a:rPr lang="en-US" dirty="0" err="1"/>
+              <a:t>ambienti</a:t>
+            </a:r>
+            <a:r>
+              <a:rPr lang="en-US" dirty="0"/>
+              <a:t> </a:t>
+            </a:r>
+            <a:r>
+              <a:rPr lang="en-US" dirty="0" err="1"/>
+              <a:t>virtuali</a:t>
+            </a:r>
+            <a:r>
+              <a:rPr lang="en-US" dirty="0"/>
+              <a:t> Python</a:t>
+            </a:r>
+          </a:p>
+        </p:txBody>
+      </p:sp>
+      <p:sp>
+        <p:nvSpPr>
+          <p:cNvPr id="3" name="Content Placeholder 2">
+            <a:extLst>
+              <a:ext uri="{FF2B5EF4-FFF2-40B4-BE49-F238E27FC236}">
+                <a16:creationId xmlns:a16="http://schemas.microsoft.com/office/drawing/2014/main" id="{7DBD14B4-C920-6A74-E0D5-3FF79EF6DE1D}"/>
+              </a:ext>
+            </a:extLst>
+          </p:cNvPr>
+          <p:cNvSpPr>
+            <a:spLocks noGrp="1"/>
+          </p:cNvSpPr>
+          <p:nvPr>
+            <p:ph idx="1"/>
+          </p:nvPr>
+        </p:nvSpPr>
+        <p:spPr>
+          <a:xfrm>
+            <a:off x="838201" y="1825625"/>
+            <a:ext cx="4110318" cy="4351338"/>
+          </a:xfrm>
+        </p:spPr>
+        <p:txBody>
+          <a:bodyPr>
+            <a:normAutofit/>
+          </a:bodyPr>
+          <a:lstStyle/>
+          <a:p>
+            <a:pPr marL="0" indent="0">
+              <a:buNone/>
+            </a:pPr>
+            <a:r>
+              <a:rPr lang="it-IT" sz="1800" b="1" dirty="0"/>
+              <a:t>Problema</a:t>
+            </a:r>
+          </a:p>
+          <a:p>
+            <a:pPr marL="0" indent="0">
+              <a:buNone/>
+            </a:pPr>
+            <a:r>
+              <a:rPr lang="it-IT" sz="1800" dirty="0"/>
+              <a:t>Progetti diversi possono usare:</a:t>
+            </a:r>
+          </a:p>
+          <a:p>
+            <a:pPr marL="0" indent="0">
+              <a:buNone/>
+            </a:pPr>
+            <a:r>
+              <a:rPr lang="it-IT" sz="1800" dirty="0"/>
+              <a:t>	versioni diverse delle librerie </a:t>
+            </a:r>
+          </a:p>
+          <a:p>
+            <a:pPr marL="0" indent="0">
+              <a:buNone/>
+            </a:pPr>
+            <a:r>
+              <a:rPr lang="it-IT" sz="1800" dirty="0"/>
+              <a:t>	dipendenze incompatibili </a:t>
+            </a:r>
+          </a:p>
+          <a:p>
+            <a:pPr marL="0" indent="0">
+              <a:buNone/>
+            </a:pPr>
+            <a:endParaRPr lang="it-IT" sz="1800" dirty="0"/>
+          </a:p>
+          <a:p>
+            <a:pPr marL="0" indent="0">
+              <a:buNone/>
+            </a:pPr>
+            <a:r>
+              <a:rPr lang="it-IT" sz="1800" dirty="0"/>
+              <a:t>Esempio:</a:t>
+            </a:r>
+          </a:p>
+          <a:p>
+            <a:r>
+              <a:rPr lang="it-IT" sz="1800" dirty="0"/>
+              <a:t>Progetto A → Django 4 </a:t>
+            </a:r>
+          </a:p>
+          <a:p>
+            <a:r>
+              <a:rPr lang="it-IT" sz="1800" dirty="0"/>
+              <a:t>Progetto B → Django 5</a:t>
+            </a:r>
+          </a:p>
+          <a:p>
+            <a:endParaRPr lang="en-US" sz="1800" dirty="0"/>
+          </a:p>
+        </p:txBody>
+      </p:sp>
+      <p:sp>
+        <p:nvSpPr>
+          <p:cNvPr id="7" name="TextBox 6">
+            <a:extLst>
+              <a:ext uri="{FF2B5EF4-FFF2-40B4-BE49-F238E27FC236}">
+                <a16:creationId xmlns:a16="http://schemas.microsoft.com/office/drawing/2014/main" id="{5838E58F-F3FF-F687-8899-F95C6504EAE0}"/>
+              </a:ext>
+            </a:extLst>
+          </p:cNvPr>
+          <p:cNvSpPr txBox="1"/>
+          <p:nvPr/>
+        </p:nvSpPr>
+        <p:spPr>
+          <a:xfrm>
+            <a:off x="6221506" y="1825625"/>
+            <a:ext cx="5056094" cy="1754326"/>
+          </a:xfrm>
+          <a:prstGeom prst="rect">
+            <a:avLst/>
+          </a:prstGeom>
+          <a:noFill/>
+        </p:spPr>
+        <p:txBody>
+          <a:bodyPr wrap="square">
+            <a:spAutoFit/>
+          </a:bodyPr>
+          <a:lstStyle/>
+          <a:p>
+            <a:pPr>
+              <a:buNone/>
+            </a:pPr>
+            <a:r>
+              <a:rPr lang="it-IT" b="1" dirty="0"/>
+              <a:t>Soluzione</a:t>
+            </a:r>
+          </a:p>
+          <a:p>
+            <a:pPr>
+              <a:buNone/>
+            </a:pPr>
+            <a:r>
+              <a:rPr lang="it-IT" dirty="0">
+                <a:latin typeface="Courier New" panose="02070309020205020404" pitchFamily="49" charset="0"/>
+              </a:rPr>
+              <a:t>venv</a:t>
+            </a:r>
+            <a:r>
+              <a:rPr lang="it-IT" dirty="0"/>
+              <a:t> crea un ambiente isolato per ogni progetto.</a:t>
+            </a:r>
+          </a:p>
+          <a:p>
+            <a:pPr>
+              <a:buNone/>
+            </a:pPr>
+            <a:r>
+              <a:rPr lang="it-IT" dirty="0"/>
+              <a:t>Ogni progetto avrà:</a:t>
+            </a:r>
+          </a:p>
+          <a:p>
+            <a:pPr>
+              <a:buFont typeface="Arial" panose="020B0604020202020204" pitchFamily="34" charset="0"/>
+              <a:buChar char="•"/>
+            </a:pPr>
+            <a:r>
+              <a:rPr lang="it-IT" dirty="0"/>
+              <a:t>le proprie librerie </a:t>
+            </a:r>
+          </a:p>
+          <a:p>
+            <a:pPr>
+              <a:buFont typeface="Arial" panose="020B0604020202020204" pitchFamily="34" charset="0"/>
+              <a:buChar char="•"/>
+            </a:pPr>
+            <a:r>
+              <a:rPr lang="it-IT" dirty="0"/>
+              <a:t>le proprie versioni </a:t>
+            </a:r>
+          </a:p>
+          <a:p>
+            <a:pPr>
+              <a:buFont typeface="Arial" panose="020B0604020202020204" pitchFamily="34" charset="0"/>
+              <a:buChar char="•"/>
+            </a:pPr>
+            <a:r>
+              <a:rPr lang="it-IT" dirty="0"/>
+              <a:t>la propria configurazione</a:t>
+            </a:r>
+          </a:p>
+        </p:txBody>
+      </p:sp>
+    </p:spTree>
+    <p:extLst>
+      <p:ext uri="{BB962C8B-B14F-4D97-AF65-F5344CB8AC3E}">
+        <p14:creationId xmlns:p14="http://schemas.microsoft.com/office/powerpoint/2010/main" val="3061154852"/>
+      </p:ext>
+    </p:extLst>
+  </p:cSld>
+  <p:clrMapOvr>
+    <a:masterClrMapping/>
+  </p:clrMapOvr>
+</p:sld>
+</file>
+
+<file path=ppt/slides/slide6.xml><?xml version="1.0" encoding="utf-8"?>
+<p:sld xmlns:a="http://schemas.openxmlformats.org/drawingml/2006/main" xmlns:r="http://schemas.openxmlformats.org/officeDocument/2006/relationships" xmlns:p="http://schemas.openxmlformats.org/presentationml/2006/main">
+  <p:cSld>
+    <p:spTree>
+      <p:nvGrpSpPr>
+        <p:cNvPr id="1" name=""/>
+        <p:cNvGrpSpPr/>
+        <p:nvPr/>
+      </p:nvGrpSpPr>
+      <p:grpSpPr>
+        <a:xfrm>
+          <a:off x="0" y="0"/>
+          <a:ext cx="0" cy="0"/>
+          <a:chOff x="0" y="0"/>
+          <a:chExt cx="0" cy="0"/>
+        </a:xfrm>
+      </p:grpSpPr>
+      <p:sp>
+        <p:nvSpPr>
+          <p:cNvPr id="2" name="Title 1">
+            <a:extLst>
+              <a:ext uri="{FF2B5EF4-FFF2-40B4-BE49-F238E27FC236}">
+                <a16:creationId xmlns:a16="http://schemas.microsoft.com/office/drawing/2014/main" id="{65BE7D12-AA33-7C95-0F78-CD2328B1F26E}"/>
+              </a:ext>
+            </a:extLst>
+          </p:cNvPr>
+          <p:cNvSpPr>
+            <a:spLocks noGrp="1"/>
+          </p:cNvSpPr>
+          <p:nvPr>
+            <p:ph type="title"/>
+          </p:nvPr>
+        </p:nvSpPr>
+        <p:spPr/>
+        <p:txBody>
+          <a:bodyPr/>
+          <a:lstStyle/>
+          <a:p>
+            <a:r>
+              <a:rPr lang="en-US" dirty="0" err="1"/>
+              <a:t>venv</a:t>
+            </a:r>
+            <a:endParaRPr lang="en-US" dirty="0"/>
+          </a:p>
+        </p:txBody>
+      </p:sp>
+      <p:sp>
+        <p:nvSpPr>
+          <p:cNvPr id="7" name="TextBox 6">
+            <a:extLst>
+              <a:ext uri="{FF2B5EF4-FFF2-40B4-BE49-F238E27FC236}">
+                <a16:creationId xmlns:a16="http://schemas.microsoft.com/office/drawing/2014/main" id="{0F9FC87B-6D3C-11F4-F587-9A6C5D4472D4}"/>
+              </a:ext>
+            </a:extLst>
+          </p:cNvPr>
+          <p:cNvSpPr txBox="1"/>
+          <p:nvPr/>
+        </p:nvSpPr>
+        <p:spPr>
+          <a:xfrm>
+            <a:off x="838200" y="1551819"/>
+            <a:ext cx="6096000" cy="1477328"/>
+          </a:xfrm>
+          <a:prstGeom prst="rect">
+            <a:avLst/>
+          </a:prstGeom>
+          <a:noFill/>
+        </p:spPr>
+        <p:txBody>
+          <a:bodyPr wrap="square">
+            <a:spAutoFit/>
+          </a:bodyPr>
+          <a:lstStyle/>
+          <a:p>
+            <a:pPr>
+              <a:buNone/>
+            </a:pPr>
+            <a:r>
+              <a:rPr lang="en-US" b="1" dirty="0" err="1"/>
+              <a:t>Creare</a:t>
+            </a:r>
+            <a:r>
+              <a:rPr lang="en-US" b="1" dirty="0"/>
+              <a:t> un </a:t>
+            </a:r>
+            <a:r>
+              <a:rPr lang="en-US" b="1" dirty="0" err="1"/>
+              <a:t>ambiente</a:t>
+            </a:r>
+            <a:r>
+              <a:rPr lang="en-US" b="1" dirty="0"/>
+              <a:t> </a:t>
+            </a:r>
+            <a:r>
+              <a:rPr lang="en-US" b="1" dirty="0" err="1"/>
+              <a:t>virtuale</a:t>
+            </a:r>
+            <a:endParaRPr lang="en-US" b="1" dirty="0"/>
+          </a:p>
+          <a:p>
+            <a:pPr>
+              <a:buNone/>
+            </a:pPr>
+            <a:r>
+              <a:rPr lang="en-US" b="1" dirty="0"/>
+              <a:t>Windows</a:t>
+            </a:r>
+          </a:p>
+          <a:p>
+            <a:pPr rtl="0">
+              <a:buNone/>
+            </a:pPr>
+            <a:r>
+              <a:rPr lang="en-US" dirty="0">
+                <a:latin typeface="Courier New" panose="02070309020205020404" pitchFamily="49" charset="0"/>
+              </a:rPr>
+              <a:t>python -m </a:t>
+            </a:r>
+            <a:r>
+              <a:rPr lang="en-US" dirty="0" err="1">
+                <a:latin typeface="Courier New" panose="02070309020205020404" pitchFamily="49" charset="0"/>
+              </a:rPr>
+              <a:t>venv</a:t>
+            </a:r>
+            <a:r>
+              <a:rPr lang="en-US" dirty="0">
+                <a:latin typeface="Courier New" panose="02070309020205020404" pitchFamily="49" charset="0"/>
+              </a:rPr>
+              <a:t> </a:t>
+            </a:r>
+            <a:r>
+              <a:rPr lang="en-US" dirty="0" err="1">
+                <a:latin typeface="Courier New" panose="02070309020205020404" pitchFamily="49" charset="0"/>
+              </a:rPr>
+              <a:t>venv</a:t>
+            </a:r>
+            <a:endParaRPr lang="en-US" dirty="0">
+              <a:latin typeface="Courier New" panose="02070309020205020404" pitchFamily="49" charset="0"/>
+            </a:endParaRPr>
+          </a:p>
+          <a:p>
+            <a:pPr>
+              <a:buNone/>
+            </a:pPr>
+            <a:r>
+              <a:rPr lang="en-US" b="1" dirty="0"/>
+              <a:t>Mac / Linux</a:t>
+            </a:r>
+          </a:p>
+          <a:p>
+            <a:pPr rtl="0">
+              <a:buNone/>
+            </a:pPr>
+            <a:r>
+              <a:rPr lang="en-US" dirty="0">
+                <a:latin typeface="Courier New" panose="02070309020205020404" pitchFamily="49" charset="0"/>
+              </a:rPr>
+              <a:t>python3 -m </a:t>
+            </a:r>
+            <a:r>
+              <a:rPr lang="en-US" dirty="0" err="1">
+                <a:latin typeface="Courier New" panose="02070309020205020404" pitchFamily="49" charset="0"/>
+              </a:rPr>
+              <a:t>venv</a:t>
+            </a:r>
+            <a:r>
+              <a:rPr lang="en-US" dirty="0">
+                <a:latin typeface="Courier New" panose="02070309020205020404" pitchFamily="49" charset="0"/>
+              </a:rPr>
+              <a:t> </a:t>
+            </a:r>
+            <a:r>
+              <a:rPr lang="en-US" dirty="0" err="1">
+                <a:latin typeface="Courier New" panose="02070309020205020404" pitchFamily="49" charset="0"/>
+              </a:rPr>
+              <a:t>venv</a:t>
+            </a:r>
+            <a:endParaRPr lang="en-US" dirty="0">
+              <a:latin typeface="Courier New" panose="02070309020205020404" pitchFamily="49" charset="0"/>
+            </a:endParaRPr>
+          </a:p>
+        </p:txBody>
+      </p:sp>
+      <p:sp>
+        <p:nvSpPr>
+          <p:cNvPr id="9" name="TextBox 8">
+            <a:extLst>
+              <a:ext uri="{FF2B5EF4-FFF2-40B4-BE49-F238E27FC236}">
+                <a16:creationId xmlns:a16="http://schemas.microsoft.com/office/drawing/2014/main" id="{95AF15A6-B6DC-A027-21D4-CF07EA9D109E}"/>
+              </a:ext>
+            </a:extLst>
+          </p:cNvPr>
+          <p:cNvSpPr txBox="1"/>
+          <p:nvPr/>
+        </p:nvSpPr>
+        <p:spPr>
+          <a:xfrm>
+            <a:off x="838200" y="3219253"/>
+            <a:ext cx="6096000" cy="1477328"/>
+          </a:xfrm>
+          <a:prstGeom prst="rect">
+            <a:avLst/>
+          </a:prstGeom>
+          <a:noFill/>
+        </p:spPr>
+        <p:txBody>
+          <a:bodyPr wrap="square">
+            <a:spAutoFit/>
+          </a:bodyPr>
+          <a:lstStyle/>
+          <a:p>
+            <a:pPr>
+              <a:buNone/>
+            </a:pPr>
+            <a:r>
+              <a:rPr lang="en-US" b="1" dirty="0" err="1"/>
+              <a:t>Attivare</a:t>
+            </a:r>
+            <a:r>
+              <a:rPr lang="en-US" b="1" dirty="0"/>
+              <a:t> </a:t>
+            </a:r>
+            <a:r>
+              <a:rPr lang="en-US" b="1" dirty="0" err="1"/>
+              <a:t>l’ambiente</a:t>
+            </a:r>
+            <a:endParaRPr lang="en-US" b="1" dirty="0"/>
+          </a:p>
+          <a:p>
+            <a:pPr>
+              <a:buNone/>
+            </a:pPr>
+            <a:r>
+              <a:rPr lang="en-US" b="1" dirty="0"/>
+              <a:t>Windows</a:t>
+            </a:r>
+          </a:p>
+          <a:p>
+            <a:pPr rtl="0">
+              <a:buNone/>
+            </a:pPr>
+            <a:r>
+              <a:rPr lang="en-US" dirty="0" err="1">
+                <a:latin typeface="Courier New" panose="02070309020205020404" pitchFamily="49" charset="0"/>
+              </a:rPr>
+              <a:t>venv</a:t>
+            </a:r>
+            <a:r>
+              <a:rPr lang="en-US" dirty="0">
+                <a:latin typeface="Courier New" panose="02070309020205020404" pitchFamily="49" charset="0"/>
+              </a:rPr>
+              <a:t>\Scripts\activate</a:t>
+            </a:r>
+          </a:p>
+          <a:p>
+            <a:pPr>
+              <a:buNone/>
+            </a:pPr>
+            <a:r>
+              <a:rPr lang="en-US" b="1" dirty="0"/>
+              <a:t>Mac / Linux</a:t>
+            </a:r>
+          </a:p>
+          <a:p>
+            <a:pPr rtl="0">
+              <a:buNone/>
+            </a:pPr>
+            <a:r>
+              <a:rPr lang="en-US" dirty="0">
+                <a:latin typeface="Courier New" panose="02070309020205020404" pitchFamily="49" charset="0"/>
+              </a:rPr>
+              <a:t>source </a:t>
+            </a:r>
+            <a:r>
+              <a:rPr lang="en-US" dirty="0" err="1">
+                <a:latin typeface="Courier New" panose="02070309020205020404" pitchFamily="49" charset="0"/>
+              </a:rPr>
+              <a:t>venv</a:t>
+            </a:r>
+            <a:r>
+              <a:rPr lang="en-US" dirty="0">
+                <a:latin typeface="Courier New" panose="02070309020205020404" pitchFamily="49" charset="0"/>
+              </a:rPr>
+              <a:t>/bin/activate</a:t>
+            </a:r>
+          </a:p>
+        </p:txBody>
+      </p:sp>
+      <p:sp>
+        <p:nvSpPr>
+          <p:cNvPr id="11" name="TextBox 10">
+            <a:extLst>
+              <a:ext uri="{FF2B5EF4-FFF2-40B4-BE49-F238E27FC236}">
+                <a16:creationId xmlns:a16="http://schemas.microsoft.com/office/drawing/2014/main" id="{DBFC8F4C-A4AE-C3C8-4EA2-B6829EA9F695}"/>
+              </a:ext>
+            </a:extLst>
+          </p:cNvPr>
+          <p:cNvSpPr txBox="1"/>
+          <p:nvPr/>
+        </p:nvSpPr>
+        <p:spPr>
+          <a:xfrm>
+            <a:off x="838200" y="4983015"/>
+            <a:ext cx="6096000" cy="646331"/>
+          </a:xfrm>
+          <a:prstGeom prst="rect">
+            <a:avLst/>
+          </a:prstGeom>
+          <a:noFill/>
+        </p:spPr>
+        <p:txBody>
+          <a:bodyPr wrap="square">
+            <a:spAutoFit/>
+          </a:bodyPr>
+          <a:lstStyle/>
+          <a:p>
+            <a:pPr>
+              <a:buNone/>
+            </a:pPr>
+            <a:r>
+              <a:rPr lang="en-US" b="1" dirty="0" err="1"/>
+              <a:t>Disattivare</a:t>
+            </a:r>
+            <a:r>
+              <a:rPr lang="en-US" b="1" dirty="0"/>
+              <a:t> </a:t>
+            </a:r>
+            <a:r>
+              <a:rPr lang="en-US" b="1" dirty="0" err="1"/>
+              <a:t>l’ambiente</a:t>
+            </a:r>
+            <a:endParaRPr lang="en-US" b="1" dirty="0"/>
+          </a:p>
+          <a:p>
+            <a:pPr rtl="0">
+              <a:buNone/>
+            </a:pPr>
+            <a:r>
+              <a:rPr lang="en-US" dirty="0">
+                <a:latin typeface="Courier New" panose="02070309020205020404" pitchFamily="49" charset="0"/>
+              </a:rPr>
+              <a:t>deactivate</a:t>
+            </a:r>
+          </a:p>
+        </p:txBody>
+      </p:sp>
+      <p:sp>
+        <p:nvSpPr>
+          <p:cNvPr id="13" name="TextBox 12">
+            <a:extLst>
+              <a:ext uri="{FF2B5EF4-FFF2-40B4-BE49-F238E27FC236}">
+                <a16:creationId xmlns:a16="http://schemas.microsoft.com/office/drawing/2014/main" id="{71238293-F274-D725-7903-D35D8FD4D2C0}"/>
+              </a:ext>
+            </a:extLst>
+          </p:cNvPr>
+          <p:cNvSpPr txBox="1"/>
+          <p:nvPr/>
+        </p:nvSpPr>
+        <p:spPr>
+          <a:xfrm>
+            <a:off x="6096000" y="1536358"/>
+            <a:ext cx="6096000" cy="1200329"/>
+          </a:xfrm>
+          <a:prstGeom prst="rect">
+            <a:avLst/>
+          </a:prstGeom>
+          <a:noFill/>
+        </p:spPr>
+        <p:txBody>
+          <a:bodyPr wrap="square">
+            <a:spAutoFit/>
+          </a:bodyPr>
+          <a:lstStyle/>
+          <a:p>
+            <a:pPr>
+              <a:buNone/>
+            </a:pPr>
+            <a:r>
+              <a:rPr lang="it-IT" b="1" dirty="0"/>
+              <a:t>Best Practice</a:t>
+            </a:r>
+          </a:p>
+          <a:p>
+            <a:pPr>
+              <a:buNone/>
+            </a:pPr>
+            <a:r>
+              <a:rPr lang="it-IT" dirty="0"/>
+              <a:t>✅ Un ambiente virtuale per ogni progetto</a:t>
+            </a:r>
+            <a:br>
+              <a:rPr lang="it-IT" dirty="0"/>
+            </a:br>
+            <a:r>
+              <a:rPr lang="it-IT" dirty="0"/>
+              <a:t>✅ Non condividere cartella </a:t>
+            </a:r>
+            <a:r>
+              <a:rPr lang="it-IT" dirty="0">
+                <a:latin typeface="Courier New" panose="02070309020205020404" pitchFamily="49" charset="0"/>
+              </a:rPr>
+              <a:t>venv</a:t>
+            </a:r>
+            <a:r>
+              <a:rPr lang="it-IT" dirty="0"/>
+              <a:t> su Git</a:t>
+            </a:r>
+            <a:br>
+              <a:rPr lang="it-IT" dirty="0"/>
+            </a:br>
+            <a:r>
+              <a:rPr lang="it-IT" dirty="0"/>
+              <a:t>✅ Salvare sempre </a:t>
+            </a:r>
+            <a:r>
+              <a:rPr lang="it-IT" dirty="0">
+                <a:latin typeface="Courier New" panose="02070309020205020404" pitchFamily="49" charset="0"/>
+              </a:rPr>
+              <a:t>requirements.txt</a:t>
+            </a:r>
+            <a:endParaRPr lang="it-IT" dirty="0"/>
+          </a:p>
+        </p:txBody>
+      </p:sp>
+    </p:spTree>
+    <p:extLst>
+      <p:ext uri="{BB962C8B-B14F-4D97-AF65-F5344CB8AC3E}">
+        <p14:creationId xmlns:p14="http://schemas.microsoft.com/office/powerpoint/2010/main" val="2660867481"/>
+      </p:ext>
+    </p:extLst>
+  </p:cSld>
+  <p:clrMapOvr>
+    <a:masterClrMapping/>
+  </p:clrMapOvr>
+</p:sld>
+</file>
+
+<file path=ppt/slides/slide7.xml><?xml version="1.0" encoding="utf-8"?>
+<p:sld xmlns:a="http://schemas.openxmlformats.org/drawingml/2006/main" xmlns:r="http://schemas.openxmlformats.org/officeDocument/2006/relationships" xmlns:p="http://schemas.openxmlformats.org/presentationml/2006/main">
+  <p:cSld>
+    <p:spTree>
+      <p:nvGrpSpPr>
+        <p:cNvPr id="1" name=""/>
+        <p:cNvGrpSpPr/>
+        <p:nvPr/>
+      </p:nvGrpSpPr>
+      <p:grpSpPr>
+        <a:xfrm>
+          <a:off x="0" y="0"/>
+          <a:ext cx="0" cy="0"/>
+          <a:chOff x="0" y="0"/>
+          <a:chExt cx="0" cy="0"/>
+        </a:xfrm>
+      </p:grpSpPr>
+      <p:sp>
+        <p:nvSpPr>
+          <p:cNvPr id="2" name="Title 1">
+            <a:extLst>
+              <a:ext uri="{FF2B5EF4-FFF2-40B4-BE49-F238E27FC236}">
                 <a16:creationId xmlns:a16="http://schemas.microsoft.com/office/drawing/2014/main" id="{CBD55CF8-154F-3CC8-B248-7AC58219C3A5}"/>
               </a:ext>
             </a:extLst>
@@ -3764,6 +5205,175 @@
     <p:extLst>
       <p:ext uri="{BB962C8B-B14F-4D97-AF65-F5344CB8AC3E}">
         <p14:creationId xmlns:p14="http://schemas.microsoft.com/office/powerpoint/2010/main" val="2312129349"/>
+      </p:ext>
+    </p:extLst>
+  </p:cSld>
+  <p:clrMapOvr>
+    <a:masterClrMapping/>
+  </p:clrMapOvr>
+</p:sld>
+</file>
+
+<file path=ppt/slides/slide8.xml><?xml version="1.0" encoding="utf-8"?>
+<p:sld xmlns:a="http://schemas.openxmlformats.org/drawingml/2006/main" xmlns:r="http://schemas.openxmlformats.org/officeDocument/2006/relationships" xmlns:p="http://schemas.openxmlformats.org/presentationml/2006/main">
+  <p:cSld>
+    <p:spTree>
+      <p:nvGrpSpPr>
+        <p:cNvPr id="1" name=""/>
+        <p:cNvGrpSpPr/>
+        <p:nvPr/>
+      </p:nvGrpSpPr>
+      <p:grpSpPr>
+        <a:xfrm>
+          <a:off x="0" y="0"/>
+          <a:ext cx="0" cy="0"/>
+          <a:chOff x="0" y="0"/>
+          <a:chExt cx="0" cy="0"/>
+        </a:xfrm>
+      </p:grpSpPr>
+      <p:sp>
+        <p:nvSpPr>
+          <p:cNvPr id="2" name="Title 1">
+            <a:extLst>
+              <a:ext uri="{FF2B5EF4-FFF2-40B4-BE49-F238E27FC236}">
+                <a16:creationId xmlns:a16="http://schemas.microsoft.com/office/drawing/2014/main" id="{DF9F321A-3DBB-2CEA-D316-61BA3B8C91F8}"/>
+              </a:ext>
+            </a:extLst>
+          </p:cNvPr>
+          <p:cNvSpPr>
+            <a:spLocks noGrp="1"/>
+          </p:cNvSpPr>
+          <p:nvPr>
+            <p:ph type="title"/>
+          </p:nvPr>
+        </p:nvSpPr>
+        <p:spPr/>
+        <p:txBody>
+          <a:bodyPr/>
+          <a:lstStyle/>
+          <a:p>
+            <a:r>
+              <a:rPr lang="en-US" dirty="0"/>
+              <a:t>Agenda</a:t>
+            </a:r>
+          </a:p>
+        </p:txBody>
+      </p:sp>
+      <p:sp>
+        <p:nvSpPr>
+          <p:cNvPr id="3" name="Content Placeholder 2">
+            <a:extLst>
+              <a:ext uri="{FF2B5EF4-FFF2-40B4-BE49-F238E27FC236}">
+                <a16:creationId xmlns:a16="http://schemas.microsoft.com/office/drawing/2014/main" id="{144BDDAD-F2BA-5EC9-FC79-760DE859A970}"/>
+              </a:ext>
+            </a:extLst>
+          </p:cNvPr>
+          <p:cNvSpPr>
+            <a:spLocks noGrp="1"/>
+          </p:cNvSpPr>
+          <p:nvPr>
+            <p:ph idx="1"/>
+          </p:nvPr>
+        </p:nvSpPr>
+        <p:spPr/>
+        <p:txBody>
+          <a:bodyPr>
+            <a:normAutofit fontScale="92500" lnSpcReduction="10000"/>
+          </a:bodyPr>
+          <a:lstStyle/>
+          <a:p>
+            <a:pPr marL="0" indent="0">
+              <a:buNone/>
+            </a:pPr>
+            <a:r>
+              <a:rPr lang="it-IT" dirty="0"/>
+              <a:t>	Fondamenti di Python </a:t>
+            </a:r>
+            <a:br>
+              <a:rPr lang="it-IT" dirty="0"/>
+            </a:br>
+            <a:r>
+              <a:rPr lang="it-IT" dirty="0"/>
+              <a:t>	Programmazione a oggetti Analisi dati con Pandas </a:t>
+            </a:r>
+            <a:br>
+              <a:rPr lang="it-IT" dirty="0"/>
+            </a:br>
+            <a:r>
+              <a:rPr lang="it-IT" dirty="0"/>
+              <a:t>	Visualizzazione dati con Matplotlib </a:t>
+            </a:r>
+          </a:p>
+          <a:p>
+            <a:pPr marL="0" indent="0">
+              <a:buNone/>
+            </a:pPr>
+            <a:r>
+              <a:rPr lang="it-IT" dirty="0"/>
+              <a:t>	Interfacce grafiche con WxPython</a:t>
+            </a:r>
+          </a:p>
+          <a:p>
+            <a:pPr marL="0" indent="0">
+              <a:buNone/>
+            </a:pPr>
+            <a:r>
+              <a:rPr lang="it-IT" dirty="0"/>
+              <a:t>	Python web Django e REST API</a:t>
+            </a:r>
+            <a:br>
+              <a:rPr lang="it-IT" dirty="0"/>
+            </a:br>
+            <a:r>
+              <a:rPr lang="it-IT" dirty="0"/>
+              <a:t>	Introduzione a Machine Learning</a:t>
+            </a:r>
+          </a:p>
+          <a:p>
+            <a:pPr marL="0" indent="0">
+              <a:buNone/>
+            </a:pPr>
+            <a:r>
+              <a:rPr lang="it-IT" dirty="0"/>
+              <a:t>	Introduzione a LLM</a:t>
+            </a:r>
+          </a:p>
+          <a:p>
+            <a:pPr marL="0" indent="0">
+              <a:buNone/>
+            </a:pPr>
+            <a:r>
+              <a:rPr lang="it-IT" dirty="0"/>
+              <a:t>	docker</a:t>
+            </a:r>
+          </a:p>
+          <a:p>
+            <a:pPr marL="0" indent="0">
+              <a:buNone/>
+            </a:pPr>
+            <a:r>
+              <a:rPr lang="it-IT" dirty="0"/>
+              <a:t>	database non relazionali (installazione di redis)</a:t>
+            </a:r>
+          </a:p>
+          <a:p>
+            <a:pPr marL="0" indent="0">
+              <a:buNone/>
+            </a:pPr>
+            <a:r>
+              <a:rPr lang="it-IT" dirty="0"/>
+              <a:t>	RAG e MCP</a:t>
+            </a:r>
+          </a:p>
+          <a:p>
+            <a:endParaRPr lang="en-US" dirty="0"/>
+          </a:p>
+        </p:txBody>
+      </p:sp>
+    </p:spTree>
+    <p:extLst>
+      <p:ext uri="{BB962C8B-B14F-4D97-AF65-F5344CB8AC3E}">
+        <p14:creationId xmlns:p14="http://schemas.microsoft.com/office/powerpoint/2010/main" val="3630284680"/>
       </p:ext>
     </p:extLst>
   </p:cSld>

--- a/Lez2.pptx
+++ b/Lez2.pptx
@@ -12,7 +12,6 @@
     <p:sldId id="262" r:id="rId6"/>
     <p:sldId id="263" r:id="rId7"/>
     <p:sldId id="257" r:id="rId8"/>
-    <p:sldId id="258" r:id="rId9"/>
   </p:sldIdLst>
   <p:sldSz cx="12192000" cy="6858000"/>
   <p:notesSz cx="6858000" cy="9144000"/>
@@ -124,7 +123,7 @@
   <pc:docChgLst>
     <pc:chgData name="Alessandro Di Piazza" userId="242384fd-1746-4b70-8d90-c83f4330e5ed" providerId="ADAL" clId="{FFF1DA74-BEAE-470B-8D8A-B7A1F3E1BF85}"/>
     <pc:docChg chg="undo custSel addSld delSld modSld sldOrd">
-      <pc:chgData name="Alessandro Di Piazza" userId="242384fd-1746-4b70-8d90-c83f4330e5ed" providerId="ADAL" clId="{FFF1DA74-BEAE-470B-8D8A-B7A1F3E1BF85}" dt="2026-05-25T11:01:25.594" v="1549" actId="1076"/>
+      <pc:chgData name="Alessandro Di Piazza" userId="242384fd-1746-4b70-8d90-c83f4330e5ed" providerId="ADAL" clId="{FFF1DA74-BEAE-470B-8D8A-B7A1F3E1BF85}" dt="2026-05-27T13:02:01.965" v="1550" actId="2696"/>
       <pc:docMkLst>
         <pc:docMk/>
       </pc:docMkLst>
@@ -173,14 +172,6 @@
             <ac:spMk id="2" creationId="{CBD55CF8-154F-3CC8-B248-7AC58219C3A5}"/>
           </ac:spMkLst>
         </pc:spChg>
-        <pc:spChg chg="del mod">
-          <ac:chgData name="Alessandro Di Piazza" userId="242384fd-1746-4b70-8d90-c83f4330e5ed" providerId="ADAL" clId="{FFF1DA74-BEAE-470B-8D8A-B7A1F3E1BF85}" dt="2026-05-25T08:51:44.659" v="1168" actId="478"/>
-          <ac:spMkLst>
-            <pc:docMk/>
-            <pc:sldMk cId="2312129349" sldId="257"/>
-            <ac:spMk id="3" creationId="{BF9CDD40-1257-9380-35AA-7E7C19018596}"/>
-          </ac:spMkLst>
-        </pc:spChg>
         <pc:spChg chg="add mod">
           <ac:chgData name="Alessandro Di Piazza" userId="242384fd-1746-4b70-8d90-c83f4330e5ed" providerId="ADAL" clId="{FFF1DA74-BEAE-470B-8D8A-B7A1F3E1BF85}" dt="2026-05-25T08:52:07.132" v="1182" actId="5793"/>
           <ac:spMkLst>
@@ -189,46 +180,6 @@
             <ac:spMk id="4" creationId="{0B7B542D-4E32-7EDC-894F-B82A11C6EA85}"/>
           </ac:spMkLst>
         </pc:spChg>
-        <pc:spChg chg="add del mod">
-          <ac:chgData name="Alessandro Di Piazza" userId="242384fd-1746-4b70-8d90-c83f4330e5ed" providerId="ADAL" clId="{FFF1DA74-BEAE-470B-8D8A-B7A1F3E1BF85}" dt="2026-05-25T08:51:41.300" v="1167" actId="478"/>
-          <ac:spMkLst>
-            <pc:docMk/>
-            <pc:sldMk cId="2312129349" sldId="257"/>
-            <ac:spMk id="5" creationId="{5D022554-E8B6-AC76-51F9-AB2D1F9C2AAA}"/>
-          </ac:spMkLst>
-        </pc:spChg>
-        <pc:spChg chg="add del mod">
-          <ac:chgData name="Alessandro Di Piazza" userId="242384fd-1746-4b70-8d90-c83f4330e5ed" providerId="ADAL" clId="{FFF1DA74-BEAE-470B-8D8A-B7A1F3E1BF85}" dt="2026-05-25T08:51:44.659" v="1168" actId="478"/>
-          <ac:spMkLst>
-            <pc:docMk/>
-            <pc:sldMk cId="2312129349" sldId="257"/>
-            <ac:spMk id="7" creationId="{E5918D81-A9F2-1EB5-1398-5BEC636C5E35}"/>
-          </ac:spMkLst>
-        </pc:spChg>
-        <pc:spChg chg="add del mod">
-          <ac:chgData name="Alessandro Di Piazza" userId="242384fd-1746-4b70-8d90-c83f4330e5ed" providerId="ADAL" clId="{FFF1DA74-BEAE-470B-8D8A-B7A1F3E1BF85}" dt="2026-05-25T08:51:44.659" v="1168" actId="478"/>
-          <ac:spMkLst>
-            <pc:docMk/>
-            <pc:sldMk cId="2312129349" sldId="257"/>
-            <ac:spMk id="9" creationId="{D02EC257-B274-61A0-8C52-159AA4B8BBF4}"/>
-          </ac:spMkLst>
-        </pc:spChg>
-        <pc:picChg chg="add del mod">
-          <ac:chgData name="Alessandro Di Piazza" userId="242384fd-1746-4b70-8d90-c83f4330e5ed" providerId="ADAL" clId="{FFF1DA74-BEAE-470B-8D8A-B7A1F3E1BF85}" dt="2026-05-25T08:51:44.659" v="1168" actId="478"/>
-          <ac:picMkLst>
-            <pc:docMk/>
-            <pc:sldMk cId="2312129349" sldId="257"/>
-            <ac:picMk id="2050" creationId="{4FBB9CE7-41BE-DF9D-CDEA-4A1B6C2B83A1}"/>
-          </ac:picMkLst>
-        </pc:picChg>
-        <pc:picChg chg="add del mod">
-          <ac:chgData name="Alessandro Di Piazza" userId="242384fd-1746-4b70-8d90-c83f4330e5ed" providerId="ADAL" clId="{FFF1DA74-BEAE-470B-8D8A-B7A1F3E1BF85}" dt="2026-05-25T08:51:41.300" v="1167" actId="478"/>
-          <ac:picMkLst>
-            <pc:docMk/>
-            <pc:sldMk cId="2312129349" sldId="257"/>
-            <ac:picMk id="2052" creationId="{F0BE105D-7EDB-FA0D-EBE4-3A9CB39A52FF}"/>
-          </ac:picMkLst>
-        </pc:picChg>
       </pc:sldChg>
       <pc:sldChg chg="modSp new del mod">
         <pc:chgData name="Alessandro Di Piazza" userId="242384fd-1746-4b70-8d90-c83f4330e5ed" providerId="ADAL" clId="{FFF1DA74-BEAE-470B-8D8A-B7A1F3E1BF85}" dt="2026-05-25T08:52:11.155" v="1183" actId="2696"/>
@@ -237,28 +188,12 @@
           <pc:sldMk cId="3268373739" sldId="258"/>
         </pc:sldMkLst>
       </pc:sldChg>
-      <pc:sldChg chg="modSp new mod">
-        <pc:chgData name="Alessandro Di Piazza" userId="242384fd-1746-4b70-8d90-c83f4330e5ed" providerId="ADAL" clId="{FFF1DA74-BEAE-470B-8D8A-B7A1F3E1BF85}" dt="2026-05-25T10:50:40.263" v="1458" actId="20577"/>
+      <pc:sldChg chg="modSp new del mod">
+        <pc:chgData name="Alessandro Di Piazza" userId="242384fd-1746-4b70-8d90-c83f4330e5ed" providerId="ADAL" clId="{FFF1DA74-BEAE-470B-8D8A-B7A1F3E1BF85}" dt="2026-05-27T13:02:01.965" v="1550" actId="2696"/>
         <pc:sldMkLst>
           <pc:docMk/>
           <pc:sldMk cId="3630284680" sldId="258"/>
         </pc:sldMkLst>
-        <pc:spChg chg="mod">
-          <ac:chgData name="Alessandro Di Piazza" userId="242384fd-1746-4b70-8d90-c83f4330e5ed" providerId="ADAL" clId="{FFF1DA74-BEAE-470B-8D8A-B7A1F3E1BF85}" dt="2026-05-25T08:58:10.711" v="1205" actId="20577"/>
-          <ac:spMkLst>
-            <pc:docMk/>
-            <pc:sldMk cId="3630284680" sldId="258"/>
-            <ac:spMk id="2" creationId="{DF9F321A-3DBB-2CEA-D316-61BA3B8C91F8}"/>
-          </ac:spMkLst>
-        </pc:spChg>
-        <pc:spChg chg="mod">
-          <ac:chgData name="Alessandro Di Piazza" userId="242384fd-1746-4b70-8d90-c83f4330e5ed" providerId="ADAL" clId="{FFF1DA74-BEAE-470B-8D8A-B7A1F3E1BF85}" dt="2026-05-25T10:50:40.263" v="1458" actId="20577"/>
-          <ac:spMkLst>
-            <pc:docMk/>
-            <pc:sldMk cId="3630284680" sldId="258"/>
-            <ac:spMk id="3" creationId="{144BDDAD-F2BA-5EC9-FC79-760DE859A970}"/>
-          </ac:spMkLst>
-        </pc:spChg>
       </pc:sldChg>
       <pc:sldChg chg="modSp new mod ord">
         <pc:chgData name="Alessandro Di Piazza" userId="242384fd-1746-4b70-8d90-c83f4330e5ed" providerId="ADAL" clId="{FFF1DA74-BEAE-470B-8D8A-B7A1F3E1BF85}" dt="2026-05-25T10:55:46.977" v="1471" actId="14100"/>
@@ -379,14 +314,6 @@
             <ac:spMk id="3" creationId="{7DBD14B4-C920-6A74-E0D5-3FF79EF6DE1D}"/>
           </ac:spMkLst>
         </pc:spChg>
-        <pc:spChg chg="add del">
-          <ac:chgData name="Alessandro Di Piazza" userId="242384fd-1746-4b70-8d90-c83f4330e5ed" providerId="ADAL" clId="{FFF1DA74-BEAE-470B-8D8A-B7A1F3E1BF85}" dt="2026-05-25T10:59:38.962" v="1524" actId="22"/>
-          <ac:spMkLst>
-            <pc:docMk/>
-            <pc:sldMk cId="3061154852" sldId="262"/>
-            <ac:spMk id="5" creationId="{FF942901-F941-8512-709C-7CFC5F4DDA1F}"/>
-          </ac:spMkLst>
-        </pc:spChg>
         <pc:spChg chg="add mod">
           <ac:chgData name="Alessandro Di Piazza" userId="242384fd-1746-4b70-8d90-c83f4330e5ed" providerId="ADAL" clId="{FFF1DA74-BEAE-470B-8D8A-B7A1F3E1BF85}" dt="2026-05-25T10:59:50.691" v="1527" actId="14100"/>
           <ac:spMkLst>
@@ -415,22 +342,6 @@
             <pc:docMk/>
             <pc:sldMk cId="2660867481" sldId="263"/>
             <ac:spMk id="2" creationId="{65BE7D12-AA33-7C95-0F78-CD2328B1F26E}"/>
-          </ac:spMkLst>
-        </pc:spChg>
-        <pc:spChg chg="del mod">
-          <ac:chgData name="Alessandro Di Piazza" userId="242384fd-1746-4b70-8d90-c83f4330e5ed" providerId="ADAL" clId="{FFF1DA74-BEAE-470B-8D8A-B7A1F3E1BF85}" dt="2026-05-25T11:00:23.979" v="1536" actId="478"/>
-          <ac:spMkLst>
-            <pc:docMk/>
-            <pc:sldMk cId="2660867481" sldId="263"/>
-            <ac:spMk id="3" creationId="{5A566662-DC42-EFF5-77E1-F216CF1BAABD}"/>
-          </ac:spMkLst>
-        </pc:spChg>
-        <pc:spChg chg="add del mod">
-          <ac:chgData name="Alessandro Di Piazza" userId="242384fd-1746-4b70-8d90-c83f4330e5ed" providerId="ADAL" clId="{FFF1DA74-BEAE-470B-8D8A-B7A1F3E1BF85}" dt="2026-05-25T11:00:35.985" v="1541" actId="478"/>
-          <ac:spMkLst>
-            <pc:docMk/>
-            <pc:sldMk cId="2660867481" sldId="263"/>
-            <ac:spMk id="5" creationId="{5EDC39F9-A0E5-B661-B43D-BFC071EACE66}"/>
           </ac:spMkLst>
         </pc:spChg>
         <pc:spChg chg="add mod">
@@ -688,7 +599,7 @@
           <a:p>
             <a:fld id="{0365B9A4-39DC-4E39-840A-704E3970A69D}" type="datetimeFigureOut">
               <a:rPr lang="en-US" smtClean="0"/>
-              <a:t>5/25/2026</a:t>
+              <a:t>5/27/2026</a:t>
             </a:fld>
             <a:endParaRPr lang="en-US"/>
           </a:p>
@@ -886,7 +797,7 @@
           <a:p>
             <a:fld id="{0365B9A4-39DC-4E39-840A-704E3970A69D}" type="datetimeFigureOut">
               <a:rPr lang="en-US" smtClean="0"/>
-              <a:t>5/25/2026</a:t>
+              <a:t>5/27/2026</a:t>
             </a:fld>
             <a:endParaRPr lang="en-US"/>
           </a:p>
@@ -1094,7 +1005,7 @@
           <a:p>
             <a:fld id="{0365B9A4-39DC-4E39-840A-704E3970A69D}" type="datetimeFigureOut">
               <a:rPr lang="en-US" smtClean="0"/>
-              <a:t>5/25/2026</a:t>
+              <a:t>5/27/2026</a:t>
             </a:fld>
             <a:endParaRPr lang="en-US"/>
           </a:p>
@@ -1292,7 +1203,7 @@
           <a:p>
             <a:fld id="{0365B9A4-39DC-4E39-840A-704E3970A69D}" type="datetimeFigureOut">
               <a:rPr lang="en-US" smtClean="0"/>
-              <a:t>5/25/2026</a:t>
+              <a:t>5/27/2026</a:t>
             </a:fld>
             <a:endParaRPr lang="en-US"/>
           </a:p>
@@ -1567,7 +1478,7 @@
           <a:p>
             <a:fld id="{0365B9A4-39DC-4E39-840A-704E3970A69D}" type="datetimeFigureOut">
               <a:rPr lang="en-US" smtClean="0"/>
-              <a:t>5/25/2026</a:t>
+              <a:t>5/27/2026</a:t>
             </a:fld>
             <a:endParaRPr lang="en-US"/>
           </a:p>
@@ -1832,7 +1743,7 @@
           <a:p>
             <a:fld id="{0365B9A4-39DC-4E39-840A-704E3970A69D}" type="datetimeFigureOut">
               <a:rPr lang="en-US" smtClean="0"/>
-              <a:t>5/25/2026</a:t>
+              <a:t>5/27/2026</a:t>
             </a:fld>
             <a:endParaRPr lang="en-US"/>
           </a:p>
@@ -2244,7 +2155,7 @@
           <a:p>
             <a:fld id="{0365B9A4-39DC-4E39-840A-704E3970A69D}" type="datetimeFigureOut">
               <a:rPr lang="en-US" smtClean="0"/>
-              <a:t>5/25/2026</a:t>
+              <a:t>5/27/2026</a:t>
             </a:fld>
             <a:endParaRPr lang="en-US"/>
           </a:p>
@@ -2385,7 +2296,7 @@
           <a:p>
             <a:fld id="{0365B9A4-39DC-4E39-840A-704E3970A69D}" type="datetimeFigureOut">
               <a:rPr lang="en-US" smtClean="0"/>
-              <a:t>5/25/2026</a:t>
+              <a:t>5/27/2026</a:t>
             </a:fld>
             <a:endParaRPr lang="en-US"/>
           </a:p>
@@ -2498,7 +2409,7 @@
           <a:p>
             <a:fld id="{0365B9A4-39DC-4E39-840A-704E3970A69D}" type="datetimeFigureOut">
               <a:rPr lang="en-US" smtClean="0"/>
-              <a:t>5/25/2026</a:t>
+              <a:t>5/27/2026</a:t>
             </a:fld>
             <a:endParaRPr lang="en-US"/>
           </a:p>
@@ -2809,7 +2720,7 @@
           <a:p>
             <a:fld id="{0365B9A4-39DC-4E39-840A-704E3970A69D}" type="datetimeFigureOut">
               <a:rPr lang="en-US" smtClean="0"/>
-              <a:t>5/25/2026</a:t>
+              <a:t>5/27/2026</a:t>
             </a:fld>
             <a:endParaRPr lang="en-US"/>
           </a:p>
@@ -3097,7 +3008,7 @@
           <a:p>
             <a:fld id="{0365B9A4-39DC-4E39-840A-704E3970A69D}" type="datetimeFigureOut">
               <a:rPr lang="en-US" smtClean="0"/>
-              <a:t>5/25/2026</a:t>
+              <a:t>5/27/2026</a:t>
             </a:fld>
             <a:endParaRPr lang="en-US"/>
           </a:p>
@@ -3338,7 +3249,7 @@
           <a:p>
             <a:fld id="{0365B9A4-39DC-4E39-840A-704E3970A69D}" type="datetimeFigureOut">
               <a:rPr lang="en-US" smtClean="0"/>
-              <a:t>5/25/2026</a:t>
+              <a:t>5/27/2026</a:t>
             </a:fld>
             <a:endParaRPr lang="en-US"/>
           </a:p>
@@ -5214,175 +5125,6 @@
 </p:sld>
 </file>
 
-<file path=ppt/slides/slide8.xml><?xml version="1.0" encoding="utf-8"?>
-<p:sld xmlns:a="http://schemas.openxmlformats.org/drawingml/2006/main" xmlns:r="http://schemas.openxmlformats.org/officeDocument/2006/relationships" xmlns:p="http://schemas.openxmlformats.org/presentationml/2006/main">
-  <p:cSld>
-    <p:spTree>
-      <p:nvGrpSpPr>
-        <p:cNvPr id="1" name=""/>
-        <p:cNvGrpSpPr/>
-        <p:nvPr/>
-      </p:nvGrpSpPr>
-      <p:grpSpPr>
-        <a:xfrm>
-          <a:off x="0" y="0"/>
-          <a:ext cx="0" cy="0"/>
-          <a:chOff x="0" y="0"/>
-          <a:chExt cx="0" cy="0"/>
-        </a:xfrm>
-      </p:grpSpPr>
-      <p:sp>
-        <p:nvSpPr>
-          <p:cNvPr id="2" name="Title 1">
-            <a:extLst>
-              <a:ext uri="{FF2B5EF4-FFF2-40B4-BE49-F238E27FC236}">
-                <a16:creationId xmlns:a16="http://schemas.microsoft.com/office/drawing/2014/main" id="{DF9F321A-3DBB-2CEA-D316-61BA3B8C91F8}"/>
-              </a:ext>
-            </a:extLst>
-          </p:cNvPr>
-          <p:cNvSpPr>
-            <a:spLocks noGrp="1"/>
-          </p:cNvSpPr>
-          <p:nvPr>
-            <p:ph type="title"/>
-          </p:nvPr>
-        </p:nvSpPr>
-        <p:spPr/>
-        <p:txBody>
-          <a:bodyPr/>
-          <a:lstStyle/>
-          <a:p>
-            <a:r>
-              <a:rPr lang="en-US" dirty="0"/>
-              <a:t>Agenda</a:t>
-            </a:r>
-          </a:p>
-        </p:txBody>
-      </p:sp>
-      <p:sp>
-        <p:nvSpPr>
-          <p:cNvPr id="3" name="Content Placeholder 2">
-            <a:extLst>
-              <a:ext uri="{FF2B5EF4-FFF2-40B4-BE49-F238E27FC236}">
-                <a16:creationId xmlns:a16="http://schemas.microsoft.com/office/drawing/2014/main" id="{144BDDAD-F2BA-5EC9-FC79-760DE859A970}"/>
-              </a:ext>
-            </a:extLst>
-          </p:cNvPr>
-          <p:cNvSpPr>
-            <a:spLocks noGrp="1"/>
-          </p:cNvSpPr>
-          <p:nvPr>
-            <p:ph idx="1"/>
-          </p:nvPr>
-        </p:nvSpPr>
-        <p:spPr/>
-        <p:txBody>
-          <a:bodyPr>
-            <a:normAutofit fontScale="92500" lnSpcReduction="10000"/>
-          </a:bodyPr>
-          <a:lstStyle/>
-          <a:p>
-            <a:pPr marL="0" indent="0">
-              <a:buNone/>
-            </a:pPr>
-            <a:r>
-              <a:rPr lang="it-IT" dirty="0"/>
-              <a:t>	Fondamenti di Python </a:t>
-            </a:r>
-            <a:br>
-              <a:rPr lang="it-IT" dirty="0"/>
-            </a:br>
-            <a:r>
-              <a:rPr lang="it-IT" dirty="0"/>
-              <a:t>	Programmazione a oggetti Analisi dati con Pandas </a:t>
-            </a:r>
-            <a:br>
-              <a:rPr lang="it-IT" dirty="0"/>
-            </a:br>
-            <a:r>
-              <a:rPr lang="it-IT" dirty="0"/>
-              <a:t>	Visualizzazione dati con Matplotlib </a:t>
-            </a:r>
-          </a:p>
-          <a:p>
-            <a:pPr marL="0" indent="0">
-              <a:buNone/>
-            </a:pPr>
-            <a:r>
-              <a:rPr lang="it-IT" dirty="0"/>
-              <a:t>	Interfacce grafiche con WxPython</a:t>
-            </a:r>
-          </a:p>
-          <a:p>
-            <a:pPr marL="0" indent="0">
-              <a:buNone/>
-            </a:pPr>
-            <a:r>
-              <a:rPr lang="it-IT" dirty="0"/>
-              <a:t>	Python web Django e REST API</a:t>
-            </a:r>
-            <a:br>
-              <a:rPr lang="it-IT" dirty="0"/>
-            </a:br>
-            <a:r>
-              <a:rPr lang="it-IT" dirty="0"/>
-              <a:t>	Introduzione a Machine Learning</a:t>
-            </a:r>
-          </a:p>
-          <a:p>
-            <a:pPr marL="0" indent="0">
-              <a:buNone/>
-            </a:pPr>
-            <a:r>
-              <a:rPr lang="it-IT" dirty="0"/>
-              <a:t>	Introduzione a LLM</a:t>
-            </a:r>
-          </a:p>
-          <a:p>
-            <a:pPr marL="0" indent="0">
-              <a:buNone/>
-            </a:pPr>
-            <a:r>
-              <a:rPr lang="it-IT" dirty="0"/>
-              <a:t>	docker</a:t>
-            </a:r>
-          </a:p>
-          <a:p>
-            <a:pPr marL="0" indent="0">
-              <a:buNone/>
-            </a:pPr>
-            <a:r>
-              <a:rPr lang="it-IT" dirty="0"/>
-              <a:t>	database non relazionali (installazione di redis)</a:t>
-            </a:r>
-          </a:p>
-          <a:p>
-            <a:pPr marL="0" indent="0">
-              <a:buNone/>
-            </a:pPr>
-            <a:r>
-              <a:rPr lang="it-IT" dirty="0"/>
-              <a:t>	RAG e MCP</a:t>
-            </a:r>
-          </a:p>
-          <a:p>
-            <a:endParaRPr lang="en-US" dirty="0"/>
-          </a:p>
-        </p:txBody>
-      </p:sp>
-    </p:spTree>
-    <p:extLst>
-      <p:ext uri="{BB962C8B-B14F-4D97-AF65-F5344CB8AC3E}">
-        <p14:creationId xmlns:p14="http://schemas.microsoft.com/office/powerpoint/2010/main" val="3630284680"/>
-      </p:ext>
-    </p:extLst>
-  </p:cSld>
-  <p:clrMapOvr>
-    <a:masterClrMapping/>
-  </p:clrMapOvr>
-</p:sld>
-</file>
-
 <file path=ppt/theme/theme1.xml><?xml version="1.0" encoding="utf-8"?>
 <a:theme xmlns:a="http://schemas.openxmlformats.org/drawingml/2006/main" name="Office Theme">
   <a:themeElements>

--- a/Lez2.pptx
+++ b/Lez2.pptx
@@ -6,12 +6,12 @@
   </p:sldMasterIdLst>
   <p:sldIdLst>
     <p:sldId id="256" r:id="rId2"/>
-    <p:sldId id="259" r:id="rId3"/>
-    <p:sldId id="260" r:id="rId4"/>
-    <p:sldId id="261" r:id="rId5"/>
-    <p:sldId id="262" r:id="rId6"/>
-    <p:sldId id="263" r:id="rId7"/>
-    <p:sldId id="257" r:id="rId8"/>
+    <p:sldId id="257" r:id="rId3"/>
+    <p:sldId id="259" r:id="rId4"/>
+    <p:sldId id="260" r:id="rId5"/>
+    <p:sldId id="261" r:id="rId6"/>
+    <p:sldId id="262" r:id="rId7"/>
+    <p:sldId id="263" r:id="rId8"/>
   </p:sldIdLst>
   <p:sldSz cx="12192000" cy="6858000"/>
   <p:notesSz cx="6858000" cy="9144000"/>
@@ -123,7 +123,7 @@
   <pc:docChgLst>
     <pc:chgData name="Alessandro Di Piazza" userId="242384fd-1746-4b70-8d90-c83f4330e5ed" providerId="ADAL" clId="{FFF1DA74-BEAE-470B-8D8A-B7A1F3E1BF85}"/>
     <pc:docChg chg="undo custSel addSld delSld modSld sldOrd">
-      <pc:chgData name="Alessandro Di Piazza" userId="242384fd-1746-4b70-8d90-c83f4330e5ed" providerId="ADAL" clId="{FFF1DA74-BEAE-470B-8D8A-B7A1F3E1BF85}" dt="2026-05-27T13:02:01.965" v="1550" actId="2696"/>
+      <pc:chgData name="Alessandro Di Piazza" userId="242384fd-1746-4b70-8d90-c83f4330e5ed" providerId="ADAL" clId="{FFF1DA74-BEAE-470B-8D8A-B7A1F3E1BF85}" dt="2026-05-28T17:10:31.194" v="1602" actId="2696"/>
       <pc:docMkLst>
         <pc:docMk/>
       </pc:docMkLst>
@@ -158,8 +158,8 @@
           </ac:picMkLst>
         </pc:picChg>
       </pc:sldChg>
-      <pc:sldChg chg="addSp delSp modSp new mod">
-        <pc:chgData name="Alessandro Di Piazza" userId="242384fd-1746-4b70-8d90-c83f4330e5ed" providerId="ADAL" clId="{FFF1DA74-BEAE-470B-8D8A-B7A1F3E1BF85}" dt="2026-05-25T08:52:07.132" v="1182" actId="5793"/>
+      <pc:sldChg chg="addSp delSp modSp new mod ord">
+        <pc:chgData name="Alessandro Di Piazza" userId="242384fd-1746-4b70-8d90-c83f4330e5ed" providerId="ADAL" clId="{FFF1DA74-BEAE-470B-8D8A-B7A1F3E1BF85}" dt="2026-05-28T06:54:15.932" v="1552"/>
         <pc:sldMkLst>
           <pc:docMk/>
           <pc:sldMk cId="2312129349" sldId="257"/>
@@ -331,7 +331,7 @@
         </pc:sldMkLst>
       </pc:sldChg>
       <pc:sldChg chg="addSp delSp modSp new mod">
-        <pc:chgData name="Alessandro Di Piazza" userId="242384fd-1746-4b70-8d90-c83f4330e5ed" providerId="ADAL" clId="{FFF1DA74-BEAE-470B-8D8A-B7A1F3E1BF85}" dt="2026-05-25T11:01:25.594" v="1549" actId="1076"/>
+        <pc:chgData name="Alessandro Di Piazza" userId="242384fd-1746-4b70-8d90-c83f4330e5ed" providerId="ADAL" clId="{FFF1DA74-BEAE-470B-8D8A-B7A1F3E1BF85}" dt="2026-05-28T07:31:33.098" v="1554" actId="20577"/>
         <pc:sldMkLst>
           <pc:docMk/>
           <pc:sldMk cId="2660867481" sldId="263"/>
@@ -353,7 +353,7 @@
           </ac:spMkLst>
         </pc:spChg>
         <pc:spChg chg="add mod">
-          <ac:chgData name="Alessandro Di Piazza" userId="242384fd-1746-4b70-8d90-c83f4330e5ed" providerId="ADAL" clId="{FFF1DA74-BEAE-470B-8D8A-B7A1F3E1BF85}" dt="2026-05-25T11:00:55.011" v="1545" actId="1076"/>
+          <ac:chgData name="Alessandro Di Piazza" userId="242384fd-1746-4b70-8d90-c83f4330e5ed" providerId="ADAL" clId="{FFF1DA74-BEAE-470B-8D8A-B7A1F3E1BF85}" dt="2026-05-28T07:31:33.098" v="1554" actId="20577"/>
           <ac:spMkLst>
             <pc:docMk/>
             <pc:sldMk cId="2660867481" sldId="263"/>
@@ -374,6 +374,29 @@
             <pc:docMk/>
             <pc:sldMk cId="2660867481" sldId="263"/>
             <ac:spMk id="13" creationId="{71238293-F274-D725-7903-D35D8FD4D2C0}"/>
+          </ac:spMkLst>
+        </pc:spChg>
+      </pc:sldChg>
+      <pc:sldChg chg="modSp new del mod">
+        <pc:chgData name="Alessandro Di Piazza" userId="242384fd-1746-4b70-8d90-c83f4330e5ed" providerId="ADAL" clId="{FFF1DA74-BEAE-470B-8D8A-B7A1F3E1BF85}" dt="2026-05-28T17:10:31.194" v="1602" actId="2696"/>
+        <pc:sldMkLst>
+          <pc:docMk/>
+          <pc:sldMk cId="746817217" sldId="264"/>
+        </pc:sldMkLst>
+        <pc:spChg chg="mod">
+          <ac:chgData name="Alessandro Di Piazza" userId="242384fd-1746-4b70-8d90-c83f4330e5ed" providerId="ADAL" clId="{FFF1DA74-BEAE-470B-8D8A-B7A1F3E1BF85}" dt="2026-05-28T08:42:04.695" v="1562" actId="20577"/>
+          <ac:spMkLst>
+            <pc:docMk/>
+            <pc:sldMk cId="746817217" sldId="264"/>
+            <ac:spMk id="2" creationId="{7D61CAAB-1831-FF78-3C35-7DC8BF48987E}"/>
+          </ac:spMkLst>
+        </pc:spChg>
+        <pc:spChg chg="mod">
+          <ac:chgData name="Alessandro Di Piazza" userId="242384fd-1746-4b70-8d90-c83f4330e5ed" providerId="ADAL" clId="{FFF1DA74-BEAE-470B-8D8A-B7A1F3E1BF85}" dt="2026-05-28T13:27:39.039" v="1601" actId="20577"/>
+          <ac:spMkLst>
+            <pc:docMk/>
+            <pc:sldMk cId="746817217" sldId="264"/>
+            <ac:spMk id="3" creationId="{DF6ECBCD-3BD6-B237-B660-91CBA33E9ED1}"/>
           </ac:spMkLst>
         </pc:spChg>
       </pc:sldChg>
@@ -599,7 +622,7 @@
           <a:p>
             <a:fld id="{0365B9A4-39DC-4E39-840A-704E3970A69D}" type="datetimeFigureOut">
               <a:rPr lang="en-US" smtClean="0"/>
-              <a:t>5/27/2026</a:t>
+              <a:t>5/28/2026</a:t>
             </a:fld>
             <a:endParaRPr lang="en-US"/>
           </a:p>
@@ -797,7 +820,7 @@
           <a:p>
             <a:fld id="{0365B9A4-39DC-4E39-840A-704E3970A69D}" type="datetimeFigureOut">
               <a:rPr lang="en-US" smtClean="0"/>
-              <a:t>5/27/2026</a:t>
+              <a:t>5/28/2026</a:t>
             </a:fld>
             <a:endParaRPr lang="en-US"/>
           </a:p>
@@ -1005,7 +1028,7 @@
           <a:p>
             <a:fld id="{0365B9A4-39DC-4E39-840A-704E3970A69D}" type="datetimeFigureOut">
               <a:rPr lang="en-US" smtClean="0"/>
-              <a:t>5/27/2026</a:t>
+              <a:t>5/28/2026</a:t>
             </a:fld>
             <a:endParaRPr lang="en-US"/>
           </a:p>
@@ -1203,7 +1226,7 @@
           <a:p>
             <a:fld id="{0365B9A4-39DC-4E39-840A-704E3970A69D}" type="datetimeFigureOut">
               <a:rPr lang="en-US" smtClean="0"/>
-              <a:t>5/27/2026</a:t>
+              <a:t>5/28/2026</a:t>
             </a:fld>
             <a:endParaRPr lang="en-US"/>
           </a:p>
@@ -1478,7 +1501,7 @@
           <a:p>
             <a:fld id="{0365B9A4-39DC-4E39-840A-704E3970A69D}" type="datetimeFigureOut">
               <a:rPr lang="en-US" smtClean="0"/>
-              <a:t>5/27/2026</a:t>
+              <a:t>5/28/2026</a:t>
             </a:fld>
             <a:endParaRPr lang="en-US"/>
           </a:p>
@@ -1743,7 +1766,7 @@
           <a:p>
             <a:fld id="{0365B9A4-39DC-4E39-840A-704E3970A69D}" type="datetimeFigureOut">
               <a:rPr lang="en-US" smtClean="0"/>
-              <a:t>5/27/2026</a:t>
+              <a:t>5/28/2026</a:t>
             </a:fld>
             <a:endParaRPr lang="en-US"/>
           </a:p>
@@ -2155,7 +2178,7 @@
           <a:p>
             <a:fld id="{0365B9A4-39DC-4E39-840A-704E3970A69D}" type="datetimeFigureOut">
               <a:rPr lang="en-US" smtClean="0"/>
-              <a:t>5/27/2026</a:t>
+              <a:t>5/28/2026</a:t>
             </a:fld>
             <a:endParaRPr lang="en-US"/>
           </a:p>
@@ -2296,7 +2319,7 @@
           <a:p>
             <a:fld id="{0365B9A4-39DC-4E39-840A-704E3970A69D}" type="datetimeFigureOut">
               <a:rPr lang="en-US" smtClean="0"/>
-              <a:t>5/27/2026</a:t>
+              <a:t>5/28/2026</a:t>
             </a:fld>
             <a:endParaRPr lang="en-US"/>
           </a:p>
@@ -2409,7 +2432,7 @@
           <a:p>
             <a:fld id="{0365B9A4-39DC-4E39-840A-704E3970A69D}" type="datetimeFigureOut">
               <a:rPr lang="en-US" smtClean="0"/>
-              <a:t>5/27/2026</a:t>
+              <a:t>5/28/2026</a:t>
             </a:fld>
             <a:endParaRPr lang="en-US"/>
           </a:p>
@@ -2720,7 +2743,7 @@
           <a:p>
             <a:fld id="{0365B9A4-39DC-4E39-840A-704E3970A69D}" type="datetimeFigureOut">
               <a:rPr lang="en-US" smtClean="0"/>
-              <a:t>5/27/2026</a:t>
+              <a:t>5/28/2026</a:t>
             </a:fld>
             <a:endParaRPr lang="en-US"/>
           </a:p>
@@ -3008,7 +3031,7 @@
           <a:p>
             <a:fld id="{0365B9A4-39DC-4E39-840A-704E3970A69D}" type="datetimeFigureOut">
               <a:rPr lang="en-US" smtClean="0"/>
-              <a:t>5/27/2026</a:t>
+              <a:t>5/28/2026</a:t>
             </a:fld>
             <a:endParaRPr lang="en-US"/>
           </a:p>
@@ -3249,7 +3272,7 @@
           <a:p>
             <a:fld id="{0365B9A4-39DC-4E39-840A-704E3970A69D}" type="datetimeFigureOut">
               <a:rPr lang="en-US" smtClean="0"/>
-              <a:t>5/27/2026</a:t>
+              <a:t>5/28/2026</a:t>
             </a:fld>
             <a:endParaRPr lang="en-US"/>
           </a:p>
@@ -3816,7 +3839,7 @@
           <p:cNvPr id="2" name="Title 1">
             <a:extLst>
               <a:ext uri="{FF2B5EF4-FFF2-40B4-BE49-F238E27FC236}">
-                <a16:creationId xmlns:a16="http://schemas.microsoft.com/office/drawing/2014/main" id="{5BB60F13-6B21-C692-DFB4-A08B2F27D440}"/>
+                <a16:creationId xmlns:a16="http://schemas.microsoft.com/office/drawing/2014/main" id="{CBD55CF8-154F-3CC8-B248-7AC58219C3A5}"/>
               </a:ext>
             </a:extLst>
           </p:cNvPr>
@@ -3833,85 +3856,48 @@
           <a:lstStyle/>
           <a:p>
             <a:r>
+              <a:rPr lang="en-US" dirty="0" err="1"/>
+              <a:t>github</a:t>
+            </a:r>
+            <a:endParaRPr lang="en-US" dirty="0"/>
+          </a:p>
+        </p:txBody>
+      </p:sp>
+      <p:sp>
+        <p:nvSpPr>
+          <p:cNvPr id="4" name="Content Placeholder 3">
+            <a:extLst>
+              <a:ext uri="{FF2B5EF4-FFF2-40B4-BE49-F238E27FC236}">
+                <a16:creationId xmlns:a16="http://schemas.microsoft.com/office/drawing/2014/main" id="{0B7B542D-4E32-7EDC-894F-B82A11C6EA85}"/>
+              </a:ext>
+            </a:extLst>
+          </p:cNvPr>
+          <p:cNvSpPr>
+            <a:spLocks noGrp="1"/>
+          </p:cNvSpPr>
+          <p:nvPr>
+            <p:ph idx="1"/>
+          </p:nvPr>
+        </p:nvSpPr>
+        <p:spPr/>
+        <p:txBody>
+          <a:bodyPr/>
+          <a:lstStyle/>
+          <a:p>
+            <a:pPr marL="0" indent="0">
+              <a:buNone/>
+            </a:pPr>
+            <a:r>
               <a:rPr lang="en-US" dirty="0"/>
-              <a:t>Pip</a:t>
-            </a:r>
-          </a:p>
-        </p:txBody>
-      </p:sp>
-      <p:sp>
-        <p:nvSpPr>
-          <p:cNvPr id="3" name="Content Placeholder 2">
-            <a:extLst>
-              <a:ext uri="{FF2B5EF4-FFF2-40B4-BE49-F238E27FC236}">
-                <a16:creationId xmlns:a16="http://schemas.microsoft.com/office/drawing/2014/main" id="{54D12C52-767C-3C5F-EBEA-E14CB33ED5F3}"/>
-              </a:ext>
-            </a:extLst>
-          </p:cNvPr>
-          <p:cNvSpPr>
-            <a:spLocks noGrp="1"/>
-          </p:cNvSpPr>
-          <p:nvPr>
-            <p:ph idx="1"/>
-          </p:nvPr>
-        </p:nvSpPr>
-        <p:spPr>
-          <a:xfrm>
-            <a:off x="838200" y="1825625"/>
-            <a:ext cx="4890247" cy="4351338"/>
-          </a:xfrm>
-        </p:spPr>
-        <p:txBody>
-          <a:bodyPr/>
-          <a:lstStyle/>
-          <a:p>
-            <a:pPr marL="0" indent="0">
-              <a:buNone/>
-            </a:pPr>
-            <a:r>
-              <a:rPr lang="it-IT" b="1" dirty="0"/>
-              <a:t>Cos’è pip</a:t>
-            </a:r>
-          </a:p>
-          <a:p>
-            <a:r>
-              <a:rPr lang="it-IT" dirty="0"/>
-              <a:t>pip è lo strumento usato per:</a:t>
-            </a:r>
-          </a:p>
-          <a:p>
-            <a:r>
-              <a:rPr lang="it-IT" dirty="0"/>
-              <a:t>installare librerie Python </a:t>
-            </a:r>
-          </a:p>
-          <a:p>
-            <a:r>
-              <a:rPr lang="it-IT" dirty="0"/>
-              <a:t>aggiornare pacchetti </a:t>
-            </a:r>
-          </a:p>
-          <a:p>
-            <a:r>
-              <a:rPr lang="it-IT" dirty="0"/>
-              <a:t>rimuovere dipendenze </a:t>
-            </a:r>
-          </a:p>
-          <a:p>
-            <a:r>
-              <a:rPr lang="it-IT" dirty="0"/>
-              <a:t>gestire librerie esterne</a:t>
-            </a:r>
-          </a:p>
-          <a:p>
-            <a:endParaRPr lang="en-US" dirty="0"/>
+              <a:t>https://github.com/dipialx/Corso-Python</a:t>
+            </a:r>
           </a:p>
         </p:txBody>
       </p:sp>
     </p:spTree>
     <p:extLst>
       <p:ext uri="{BB962C8B-B14F-4D97-AF65-F5344CB8AC3E}">
-        <p14:creationId xmlns:p14="http://schemas.microsoft.com/office/powerpoint/2010/main" val="3918085652"/>
+        <p14:creationId xmlns:p14="http://schemas.microsoft.com/office/powerpoint/2010/main" val="2312129349"/>
       </p:ext>
     </p:extLst>
   </p:cSld>
@@ -3943,7 +3929,7 @@
           <p:cNvPr id="2" name="Title 1">
             <a:extLst>
               <a:ext uri="{FF2B5EF4-FFF2-40B4-BE49-F238E27FC236}">
-                <a16:creationId xmlns:a16="http://schemas.microsoft.com/office/drawing/2014/main" id="{62940D36-2CB6-A04E-D6E5-E8823DAD2142}"/>
+                <a16:creationId xmlns:a16="http://schemas.microsoft.com/office/drawing/2014/main" id="{5BB60F13-6B21-C692-DFB4-A08B2F27D440}"/>
               </a:ext>
             </a:extLst>
           </p:cNvPr>
@@ -3960,10 +3946,9 @@
           <a:lstStyle/>
           <a:p>
             <a:r>
-              <a:rPr lang="en-US" dirty="0" err="1"/>
-              <a:t>Esempi</a:t>
-            </a:r>
-            <a:endParaRPr lang="en-US" dirty="0"/>
+              <a:rPr lang="en-US" dirty="0"/>
+              <a:t>Pip</a:t>
+            </a:r>
           </a:p>
         </p:txBody>
       </p:sp>
@@ -3972,7 +3957,7 @@
           <p:cNvPr id="3" name="Content Placeholder 2">
             <a:extLst>
               <a:ext uri="{FF2B5EF4-FFF2-40B4-BE49-F238E27FC236}">
-                <a16:creationId xmlns:a16="http://schemas.microsoft.com/office/drawing/2014/main" id="{C6D8125E-986E-CC15-4E2E-6288A060A113}"/>
+                <a16:creationId xmlns:a16="http://schemas.microsoft.com/office/drawing/2014/main" id="{54D12C52-767C-3C5F-EBEA-E14CB33ED5F3}"/>
               </a:ext>
             </a:extLst>
           </p:cNvPr>
@@ -3983,140 +3968,52 @@
             <p:ph idx="1"/>
           </p:nvPr>
         </p:nvSpPr>
-        <p:spPr/>
-        <p:txBody>
-          <a:bodyPr/>
-          <a:lstStyle/>
-          <a:p>
-            <a:r>
-              <a:rPr lang="en-US" b="1" dirty="0" err="1"/>
-              <a:t>Installare</a:t>
-            </a:r>
-            <a:r>
-              <a:rPr lang="en-US" b="1" dirty="0"/>
-              <a:t> </a:t>
-            </a:r>
-            <a:r>
-              <a:rPr lang="en-US" b="1" dirty="0" err="1"/>
-              <a:t>una</a:t>
-            </a:r>
-            <a:r>
-              <a:rPr lang="en-US" b="1" dirty="0"/>
-              <a:t> </a:t>
-            </a:r>
-            <a:r>
-              <a:rPr lang="en-US" b="1" dirty="0" err="1"/>
-              <a:t>libreria</a:t>
-            </a:r>
-            <a:endParaRPr lang="en-US" b="1" dirty="0"/>
-          </a:p>
+        <p:spPr>
+          <a:xfrm>
+            <a:off x="838200" y="1825625"/>
+            <a:ext cx="4890247" cy="4351338"/>
+          </a:xfrm>
+        </p:spPr>
+        <p:txBody>
+          <a:bodyPr/>
+          <a:lstStyle/>
           <a:p>
             <a:pPr marL="0" indent="0">
               <a:buNone/>
             </a:pPr>
             <a:r>
-              <a:rPr lang="en-US" dirty="0">
-                <a:latin typeface="Consolas" panose="020B0609020204030204" pitchFamily="49" charset="0"/>
-              </a:rPr>
-              <a:t>	pip install requests</a:t>
-            </a:r>
-          </a:p>
-          <a:p>
-            <a:r>
-              <a:rPr lang="en-US" b="1" dirty="0" err="1"/>
-              <a:t>Aggiornare</a:t>
-            </a:r>
-            <a:r>
-              <a:rPr lang="en-US" b="1" dirty="0"/>
-              <a:t> </a:t>
-            </a:r>
-            <a:r>
-              <a:rPr lang="en-US" b="1" dirty="0" err="1"/>
-              <a:t>una</a:t>
-            </a:r>
-            <a:r>
-              <a:rPr lang="en-US" b="1" dirty="0"/>
-              <a:t> </a:t>
-            </a:r>
-            <a:r>
-              <a:rPr lang="en-US" b="1" dirty="0" err="1"/>
-              <a:t>libreria</a:t>
-            </a:r>
-            <a:endParaRPr lang="en-US" b="1" dirty="0"/>
-          </a:p>
-          <a:p>
-            <a:pPr marL="0" indent="0">
-              <a:buNone/>
-            </a:pPr>
-            <a:r>
-              <a:rPr lang="en-US" dirty="0">
-                <a:latin typeface="Consolas" panose="020B0609020204030204" pitchFamily="49" charset="0"/>
-              </a:rPr>
-              <a:t>	pip install --upgrade requests</a:t>
-            </a:r>
-          </a:p>
-          <a:p>
-            <a:r>
-              <a:rPr lang="en-US" b="1" dirty="0" err="1"/>
-              <a:t>Rimuovere</a:t>
-            </a:r>
-            <a:r>
-              <a:rPr lang="en-US" b="1" dirty="0"/>
-              <a:t> </a:t>
-            </a:r>
-            <a:r>
-              <a:rPr lang="en-US" b="1" dirty="0" err="1"/>
-              <a:t>una</a:t>
-            </a:r>
-            <a:r>
-              <a:rPr lang="en-US" b="1" dirty="0"/>
-              <a:t> </a:t>
-            </a:r>
-            <a:r>
-              <a:rPr lang="en-US" b="1" dirty="0" err="1"/>
-              <a:t>libreria</a:t>
-            </a:r>
-            <a:endParaRPr lang="en-US" b="1" dirty="0"/>
-          </a:p>
-          <a:p>
-            <a:pPr marL="0" indent="0">
-              <a:buNone/>
-            </a:pPr>
-            <a:r>
-              <a:rPr lang="en-US" dirty="0">
-                <a:latin typeface="Consolas" panose="020B0609020204030204" pitchFamily="49" charset="0"/>
-              </a:rPr>
-              <a:t>	pip uninstall requests</a:t>
-            </a:r>
-          </a:p>
-          <a:p>
-            <a:r>
-              <a:rPr lang="en-US" b="1" dirty="0"/>
-              <a:t>Vedere </a:t>
-            </a:r>
-            <a:r>
-              <a:rPr lang="en-US" b="1" dirty="0" err="1"/>
-              <a:t>librerie</a:t>
-            </a:r>
-            <a:r>
-              <a:rPr lang="en-US" b="1" dirty="0"/>
-              <a:t> </a:t>
-            </a:r>
-            <a:r>
-              <a:rPr lang="en-US" b="1" dirty="0" err="1"/>
-              <a:t>installate</a:t>
-            </a:r>
-            <a:endParaRPr lang="en-US" b="1" dirty="0"/>
-          </a:p>
-          <a:p>
-            <a:pPr marL="0" indent="0">
-              <a:buNone/>
-            </a:pPr>
-            <a:r>
-              <a:rPr lang="en-US" dirty="0">
-                <a:latin typeface="Consolas" panose="020B0609020204030204" pitchFamily="49" charset="0"/>
-              </a:rPr>
-              <a:t>	pip list</a:t>
+              <a:rPr lang="it-IT" b="1" dirty="0"/>
+              <a:t>Cos’è pip</a:t>
+            </a:r>
+          </a:p>
+          <a:p>
+            <a:r>
+              <a:rPr lang="it-IT" dirty="0"/>
+              <a:t>pip è lo strumento usato per:</a:t>
+            </a:r>
+          </a:p>
+          <a:p>
+            <a:r>
+              <a:rPr lang="it-IT" dirty="0"/>
+              <a:t>installare librerie Python </a:t>
+            </a:r>
+          </a:p>
+          <a:p>
+            <a:r>
+              <a:rPr lang="it-IT" dirty="0"/>
+              <a:t>aggiornare pacchetti </a:t>
+            </a:r>
+          </a:p>
+          <a:p>
+            <a:r>
+              <a:rPr lang="it-IT" dirty="0"/>
+              <a:t>rimuovere dipendenze </a:t>
+            </a:r>
+          </a:p>
+          <a:p>
+            <a:r>
+              <a:rPr lang="it-IT" dirty="0"/>
+              <a:t>gestire librerie esterne</a:t>
             </a:r>
           </a:p>
           <a:p>
@@ -4127,7 +4024,7 @@
     </p:spTree>
     <p:extLst>
       <p:ext uri="{BB962C8B-B14F-4D97-AF65-F5344CB8AC3E}">
-        <p14:creationId xmlns:p14="http://schemas.microsoft.com/office/powerpoint/2010/main" val="502201516"/>
+        <p14:creationId xmlns:p14="http://schemas.microsoft.com/office/powerpoint/2010/main" val="3918085652"/>
       </p:ext>
     </p:extLst>
   </p:cSld>
@@ -4159,7 +4056,7 @@
           <p:cNvPr id="2" name="Title 1">
             <a:extLst>
               <a:ext uri="{FF2B5EF4-FFF2-40B4-BE49-F238E27FC236}">
-                <a16:creationId xmlns:a16="http://schemas.microsoft.com/office/drawing/2014/main" id="{AD998BCE-01DE-CF18-1DBE-627827C7CD30}"/>
+                <a16:creationId xmlns:a16="http://schemas.microsoft.com/office/drawing/2014/main" id="{62940D36-2CB6-A04E-D6E5-E8823DAD2142}"/>
               </a:ext>
             </a:extLst>
           </p:cNvPr>
@@ -4176,9 +4073,10 @@
           <a:lstStyle/>
           <a:p>
             <a:r>
-              <a:rPr lang="en-US" dirty="0"/>
-              <a:t>File requirements.txt</a:t>
-            </a:r>
+              <a:rPr lang="en-US" dirty="0" err="1"/>
+              <a:t>Esempi</a:t>
+            </a:r>
+            <a:endParaRPr lang="en-US" dirty="0"/>
           </a:p>
         </p:txBody>
       </p:sp>
@@ -4187,7 +4085,7 @@
           <p:cNvPr id="3" name="Content Placeholder 2">
             <a:extLst>
               <a:ext uri="{FF2B5EF4-FFF2-40B4-BE49-F238E27FC236}">
-                <a16:creationId xmlns:a16="http://schemas.microsoft.com/office/drawing/2014/main" id="{12136BC6-EA0A-E044-AF32-02FA492EE473}"/>
+                <a16:creationId xmlns:a16="http://schemas.microsoft.com/office/drawing/2014/main" id="{C6D8125E-986E-CC15-4E2E-6288A060A113}"/>
               </a:ext>
             </a:extLst>
           </p:cNvPr>
@@ -4200,120 +4098,139 @@
         </p:nvSpPr>
         <p:spPr/>
         <p:txBody>
-          <a:bodyPr>
-            <a:normAutofit/>
-          </a:bodyPr>
-          <a:lstStyle/>
+          <a:bodyPr/>
+          <a:lstStyle/>
+          <a:p>
+            <a:r>
+              <a:rPr lang="en-US" b="1" dirty="0" err="1"/>
+              <a:t>Installare</a:t>
+            </a:r>
+            <a:r>
+              <a:rPr lang="en-US" b="1" dirty="0"/>
+              <a:t> </a:t>
+            </a:r>
+            <a:r>
+              <a:rPr lang="en-US" b="1" dirty="0" err="1"/>
+              <a:t>una</a:t>
+            </a:r>
+            <a:r>
+              <a:rPr lang="en-US" b="1" dirty="0"/>
+              <a:t> </a:t>
+            </a:r>
+            <a:r>
+              <a:rPr lang="en-US" b="1" dirty="0" err="1"/>
+              <a:t>libreria</a:t>
+            </a:r>
+            <a:endParaRPr lang="en-US" b="1" dirty="0"/>
+          </a:p>
           <a:p>
             <a:pPr marL="0" indent="0">
               <a:buNone/>
             </a:pPr>
-            <a:r>
-              <a:rPr lang="en-US" b="1" dirty="0" err="1"/>
-              <a:t>Generare</a:t>
-            </a:r>
-            <a:r>
-              <a:rPr lang="en-US" b="1" dirty="0"/>
-              <a:t> requirements.txt</a:t>
-            </a:r>
-          </a:p>
-          <a:p>
-            <a:pPr marL="0" indent="0">
-              <a:buNone/>
-            </a:pPr>
-            <a:r>
-              <a:rPr lang="en-US" dirty="0"/>
-              <a:t>	</a:t>
-            </a:r>
             <a:r>
               <a:rPr lang="en-US" dirty="0">
                 <a:latin typeface="Consolas" panose="020B0609020204030204" pitchFamily="49" charset="0"/>
               </a:rPr>
-              <a:t>pip freeze &gt; requirements.txt</a:t>
-            </a:r>
+              <a:t>	pip install requests</a:t>
+            </a:r>
+          </a:p>
+          <a:p>
+            <a:r>
+              <a:rPr lang="en-US" b="1" dirty="0" err="1"/>
+              <a:t>Aggiornare</a:t>
+            </a:r>
+            <a:r>
+              <a:rPr lang="en-US" b="1" dirty="0"/>
+              <a:t> </a:t>
+            </a:r>
+            <a:r>
+              <a:rPr lang="en-US" b="1" dirty="0" err="1"/>
+              <a:t>una</a:t>
+            </a:r>
+            <a:r>
+              <a:rPr lang="en-US" b="1" dirty="0"/>
+              <a:t> </a:t>
+            </a:r>
+            <a:r>
+              <a:rPr lang="en-US" b="1" dirty="0" err="1"/>
+              <a:t>libreria</a:t>
+            </a:r>
+            <a:endParaRPr lang="en-US" b="1" dirty="0"/>
           </a:p>
           <a:p>
             <a:pPr marL="0" indent="0">
               <a:buNone/>
             </a:pPr>
-            <a:r>
-              <a:rPr lang="en-US" b="1" dirty="0" err="1"/>
-              <a:t>Installare</a:t>
-            </a:r>
-            <a:r>
-              <a:rPr lang="en-US" b="1" dirty="0"/>
-              <a:t> da file</a:t>
-            </a:r>
-          </a:p>
-          <a:p>
-            <a:pPr marL="0" indent="0">
-              <a:buNone/>
-            </a:pPr>
-            <a:r>
-              <a:rPr lang="en-US" dirty="0"/>
-              <a:t>	</a:t>
-            </a:r>
             <a:r>
               <a:rPr lang="en-US" dirty="0">
                 <a:latin typeface="Consolas" panose="020B0609020204030204" pitchFamily="49" charset="0"/>
               </a:rPr>
-              <a:t>pip install -r requirements.txt</a:t>
-            </a:r>
-            <a:br>
-              <a:rPr lang="en-US" dirty="0"/>
-            </a:br>
-            <a:endParaRPr lang="en-US" dirty="0"/>
+              <a:t>	pip install --upgrade requests</a:t>
+            </a:r>
+          </a:p>
+          <a:p>
+            <a:r>
+              <a:rPr lang="en-US" b="1" dirty="0" err="1"/>
+              <a:t>Rimuovere</a:t>
+            </a:r>
+            <a:r>
+              <a:rPr lang="en-US" b="1" dirty="0"/>
+              <a:t> </a:t>
+            </a:r>
+            <a:r>
+              <a:rPr lang="en-US" b="1" dirty="0" err="1"/>
+              <a:t>una</a:t>
+            </a:r>
+            <a:r>
+              <a:rPr lang="en-US" b="1" dirty="0"/>
+              <a:t> </a:t>
+            </a:r>
+            <a:r>
+              <a:rPr lang="en-US" b="1" dirty="0" err="1"/>
+              <a:t>libreria</a:t>
+            </a:r>
+            <a:endParaRPr lang="en-US" b="1" dirty="0"/>
           </a:p>
           <a:p>
             <a:pPr marL="0" indent="0">
               <a:buNone/>
             </a:pPr>
             <a:r>
-              <a:rPr lang="en-US" dirty="0"/>
-              <a:t>pip </a:t>
-            </a:r>
-            <a:r>
-              <a:rPr lang="en-US" dirty="0" err="1"/>
-              <a:t>installa</a:t>
-            </a:r>
-            <a:r>
-              <a:rPr lang="en-US" dirty="0"/>
+              <a:rPr lang="en-US" dirty="0">
+                <a:latin typeface="Consolas" panose="020B0609020204030204" pitchFamily="49" charset="0"/>
+              </a:rPr>
+              <a:t>	pip uninstall requests</a:t>
+            </a:r>
+          </a:p>
+          <a:p>
+            <a:r>
+              <a:rPr lang="en-US" b="1" dirty="0"/>
+              <a:t>Vedere </a:t>
+            </a:r>
+            <a:r>
+              <a:rPr lang="en-US" b="1" dirty="0" err="1"/>
+              <a:t>librerie</a:t>
+            </a:r>
+            <a:r>
+              <a:rPr lang="en-US" b="1" dirty="0"/>
               <a:t> </a:t>
             </a:r>
             <a:r>
-              <a:rPr lang="en-US" dirty="0" err="1"/>
-              <a:t>pacchetti</a:t>
-            </a:r>
-            <a:r>
-              <a:rPr lang="en-US" dirty="0"/>
-              <a:t> dal repository </a:t>
-            </a:r>
-            <a:r>
-              <a:rPr lang="en-US" dirty="0" err="1"/>
-              <a:t>ufficiale</a:t>
-            </a:r>
-            <a:r>
-              <a:rPr lang="en-US" dirty="0"/>
-              <a:t> Python:</a:t>
-            </a:r>
+              <a:rPr lang="en-US" b="1" dirty="0" err="1"/>
+              <a:t>installate</a:t>
+            </a:r>
+            <a:endParaRPr lang="en-US" b="1" dirty="0"/>
           </a:p>
           <a:p>
             <a:pPr marL="0" indent="0">
               <a:buNone/>
             </a:pPr>
             <a:r>
-              <a:rPr lang="en-US" b="1" dirty="0" err="1">
-                <a:hlinkClick r:id="rId2"/>
+              <a:rPr lang="en-US" dirty="0">
+                <a:latin typeface="Consolas" panose="020B0609020204030204" pitchFamily="49" charset="0"/>
               </a:rPr>
-              <a:t>PyPI</a:t>
-            </a:r>
-            <a:r>
-              <a:rPr lang="en-US" b="1" dirty="0">
-                <a:hlinkClick r:id="rId2"/>
-              </a:rPr>
-              <a:t> (Python Package Index)</a:t>
-            </a:r>
-            <a:endParaRPr lang="en-US" b="1" dirty="0"/>
+              <a:t>	pip list</a:t>
+            </a:r>
           </a:p>
           <a:p>
             <a:endParaRPr lang="en-US" dirty="0"/>
@@ -4323,7 +4240,7 @@
     </p:spTree>
     <p:extLst>
       <p:ext uri="{BB962C8B-B14F-4D97-AF65-F5344CB8AC3E}">
-        <p14:creationId xmlns:p14="http://schemas.microsoft.com/office/powerpoint/2010/main" val="689915869"/>
+        <p14:creationId xmlns:p14="http://schemas.microsoft.com/office/powerpoint/2010/main" val="502201516"/>
       </p:ext>
     </p:extLst>
   </p:cSld>
@@ -4355,7 +4272,7 @@
           <p:cNvPr id="2" name="Title 1">
             <a:extLst>
               <a:ext uri="{FF2B5EF4-FFF2-40B4-BE49-F238E27FC236}">
-                <a16:creationId xmlns:a16="http://schemas.microsoft.com/office/drawing/2014/main" id="{5B7F4919-26F3-6CD5-4424-1878568FBEF2}"/>
+                <a16:creationId xmlns:a16="http://schemas.microsoft.com/office/drawing/2014/main" id="{AD998BCE-01DE-CF18-1DBE-627827C7CD30}"/>
               </a:ext>
             </a:extLst>
           </p:cNvPr>
@@ -4372,28 +4289,8 @@
           <a:lstStyle/>
           <a:p>
             <a:r>
-              <a:rPr lang="en-US" dirty="0" err="1"/>
-              <a:t>venv</a:t>
-            </a:r>
-            <a:r>
               <a:rPr lang="en-US" dirty="0"/>
-              <a:t>: </a:t>
-            </a:r>
-            <a:r>
-              <a:rPr lang="en-US" dirty="0" err="1"/>
-              <a:t>ambienti</a:t>
-            </a:r>
-            <a:r>
-              <a:rPr lang="en-US" dirty="0"/>
-              <a:t> </a:t>
-            </a:r>
-            <a:r>
-              <a:rPr lang="en-US" dirty="0" err="1"/>
-              <a:t>virtuali</a:t>
-            </a:r>
-            <a:r>
-              <a:rPr lang="en-US" dirty="0"/>
-              <a:t> Python</a:t>
+              <a:t>File requirements.txt</a:t>
             </a:r>
           </a:p>
         </p:txBody>
@@ -4403,7 +4300,7 @@
           <p:cNvPr id="3" name="Content Placeholder 2">
             <a:extLst>
               <a:ext uri="{FF2B5EF4-FFF2-40B4-BE49-F238E27FC236}">
-                <a16:creationId xmlns:a16="http://schemas.microsoft.com/office/drawing/2014/main" id="{7DBD14B4-C920-6A74-E0D5-3FF79EF6DE1D}"/>
+                <a16:creationId xmlns:a16="http://schemas.microsoft.com/office/drawing/2014/main" id="{12136BC6-EA0A-E044-AF32-02FA492EE473}"/>
               </a:ext>
             </a:extLst>
           </p:cNvPr>
@@ -4414,12 +4311,7 @@
             <p:ph idx="1"/>
           </p:nvPr>
         </p:nvSpPr>
-        <p:spPr>
-          <a:xfrm>
-            <a:off x="838201" y="1825625"/>
-            <a:ext cx="4110318" cy="4351338"/>
-          </a:xfrm>
-        </p:spPr>
+        <p:spPr/>
         <p:txBody>
           <a:bodyPr>
             <a:normAutofit/>
@@ -4430,8 +4322,12 @@
               <a:buNone/>
             </a:pPr>
             <a:r>
-              <a:rPr lang="it-IT" sz="1800" b="1" dirty="0"/>
-              <a:t>Problema</a:t>
+              <a:rPr lang="en-US" b="1" dirty="0" err="1"/>
+              <a:t>Generare</a:t>
+            </a:r>
+            <a:r>
+              <a:rPr lang="en-US" b="1" dirty="0"/>
+              <a:t> requirements.txt</a:t>
             </a:r>
           </a:p>
           <a:p>
@@ -4439,8 +4335,14 @@
               <a:buNone/>
             </a:pPr>
             <a:r>
-              <a:rPr lang="it-IT" sz="1800" dirty="0"/>
-              <a:t>Progetti diversi possono usare:</a:t>
+              <a:rPr lang="en-US" dirty="0"/>
+              <a:t>	</a:t>
+            </a:r>
+            <a:r>
+              <a:rPr lang="en-US" dirty="0">
+                <a:latin typeface="Consolas" panose="020B0609020204030204" pitchFamily="49" charset="0"/>
+              </a:rPr>
+              <a:t>pip freeze &gt; requirements.txt</a:t>
             </a:r>
           </a:p>
           <a:p>
@@ -4448,8 +4350,12 @@
               <a:buNone/>
             </a:pPr>
             <a:r>
-              <a:rPr lang="it-IT" sz="1800" dirty="0"/>
-              <a:t>	versioni diverse delle librerie </a:t>
+              <a:rPr lang="en-US" b="1" dirty="0" err="1"/>
+              <a:t>Installare</a:t>
+            </a:r>
+            <a:r>
+              <a:rPr lang="en-US" b="1" dirty="0"/>
+              <a:t> da file</a:t>
             </a:r>
           </a:p>
           <a:p>
@@ -4457,138 +4363,80 @@
               <a:buNone/>
             </a:pPr>
             <a:r>
-              <a:rPr lang="it-IT" sz="1800" dirty="0"/>
-              <a:t>	dipendenze incompatibili </a:t>
-            </a:r>
+              <a:rPr lang="en-US" dirty="0"/>
+              <a:t>	</a:t>
+            </a:r>
+            <a:r>
+              <a:rPr lang="en-US" dirty="0">
+                <a:latin typeface="Consolas" panose="020B0609020204030204" pitchFamily="49" charset="0"/>
+              </a:rPr>
+              <a:t>pip install -r requirements.txt</a:t>
+            </a:r>
+            <a:br>
+              <a:rPr lang="en-US" dirty="0"/>
+            </a:br>
+            <a:endParaRPr lang="en-US" dirty="0"/>
           </a:p>
           <a:p>
             <a:pPr marL="0" indent="0">
               <a:buNone/>
             </a:pPr>
-            <a:endParaRPr lang="it-IT" sz="1800" dirty="0"/>
+            <a:r>
+              <a:rPr lang="en-US" dirty="0"/>
+              <a:t>pip </a:t>
+            </a:r>
+            <a:r>
+              <a:rPr lang="en-US" dirty="0" err="1"/>
+              <a:t>installa</a:t>
+            </a:r>
+            <a:r>
+              <a:rPr lang="en-US" dirty="0"/>
+              <a:t> </a:t>
+            </a:r>
+            <a:r>
+              <a:rPr lang="en-US" dirty="0" err="1"/>
+              <a:t>pacchetti</a:t>
+            </a:r>
+            <a:r>
+              <a:rPr lang="en-US" dirty="0"/>
+              <a:t> dal repository </a:t>
+            </a:r>
+            <a:r>
+              <a:rPr lang="en-US" dirty="0" err="1"/>
+              <a:t>ufficiale</a:t>
+            </a:r>
+            <a:r>
+              <a:rPr lang="en-US" dirty="0"/>
+              <a:t> Python:</a:t>
+            </a:r>
           </a:p>
           <a:p>
             <a:pPr marL="0" indent="0">
               <a:buNone/>
             </a:pPr>
             <a:r>
-              <a:rPr lang="it-IT" sz="1800" dirty="0"/>
-              <a:t>Esempio:</a:t>
-            </a:r>
-          </a:p>
-          <a:p>
-            <a:r>
-              <a:rPr lang="it-IT" sz="1800" dirty="0"/>
-              <a:t>Progetto A → Django 4 </a:t>
-            </a:r>
-          </a:p>
-          <a:p>
-            <a:r>
-              <a:rPr lang="it-IT" sz="1800" dirty="0"/>
-              <a:t>Progetto B → Django 5</a:t>
-            </a:r>
-          </a:p>
-          <a:p>
-            <a:endParaRPr lang="en-US" sz="1800" dirty="0"/>
-          </a:p>
-        </p:txBody>
-      </p:sp>
-      <p:sp>
-        <p:nvSpPr>
-          <p:cNvPr id="7" name="TextBox 6">
-            <a:extLst>
-              <a:ext uri="{FF2B5EF4-FFF2-40B4-BE49-F238E27FC236}">
-                <a16:creationId xmlns:a16="http://schemas.microsoft.com/office/drawing/2014/main" id="{5838E58F-F3FF-F687-8899-F95C6504EAE0}"/>
-              </a:ext>
-            </a:extLst>
-          </p:cNvPr>
-          <p:cNvSpPr txBox="1"/>
-          <p:nvPr/>
-        </p:nvSpPr>
-        <p:spPr>
-          <a:xfrm>
-            <a:off x="6221506" y="1825625"/>
-            <a:ext cx="5056094" cy="1754326"/>
-          </a:xfrm>
-          <a:prstGeom prst="rect">
-            <a:avLst/>
-          </a:prstGeom>
-          <a:noFill/>
-        </p:spPr>
-        <p:txBody>
-          <a:bodyPr wrap="square">
-            <a:spAutoFit/>
-          </a:bodyPr>
-          <a:lstStyle/>
-          <a:p>
-            <a:pPr>
-              <a:buNone/>
-            </a:pPr>
-            <a:r>
-              <a:rPr lang="it-IT" b="1" dirty="0"/>
-              <a:t>Soluzione</a:t>
-            </a:r>
-          </a:p>
-          <a:p>
-            <a:pPr>
-              <a:buNone/>
-            </a:pPr>
-            <a:r>
-              <a:rPr lang="it-IT" dirty="0">
-                <a:latin typeface="Courier New" panose="02070309020205020404" pitchFamily="49" charset="0"/>
+              <a:rPr lang="en-US" b="1" dirty="0" err="1">
+                <a:hlinkClick r:id="rId2"/>
               </a:rPr>
-              <a:t>venv</a:t>
-            </a:r>
-            <a:r>
-              <a:rPr lang="it-IT" dirty="0"/>
-              <a:t> crea un ambiente isolato per ogni progetto.</a:t>
-            </a:r>
-          </a:p>
-          <a:p>
-            <a:pPr>
-              <a:buNone/>
-            </a:pPr>
-            <a:r>
-              <a:rPr lang="it-IT" dirty="0"/>
-              <a:t>Ogni progetto avrà:</a:t>
-            </a:r>
-          </a:p>
-          <a:p>
-            <a:pPr>
-              <a:buFont typeface="Arial" panose="020B0604020202020204" pitchFamily="34" charset="0"/>
-              <a:buChar char="•"/>
-            </a:pPr>
-            <a:r>
-              <a:rPr lang="it-IT" dirty="0"/>
-              <a:t>le proprie librerie </a:t>
-            </a:r>
-          </a:p>
-          <a:p>
-            <a:pPr>
-              <a:buFont typeface="Arial" panose="020B0604020202020204" pitchFamily="34" charset="0"/>
-              <a:buChar char="•"/>
-            </a:pPr>
-            <a:r>
-              <a:rPr lang="it-IT" dirty="0"/>
-              <a:t>le proprie versioni </a:t>
-            </a:r>
-          </a:p>
-          <a:p>
-            <a:pPr>
-              <a:buFont typeface="Arial" panose="020B0604020202020204" pitchFamily="34" charset="0"/>
-              <a:buChar char="•"/>
-            </a:pPr>
-            <a:r>
-              <a:rPr lang="it-IT" dirty="0"/>
-              <a:t>la propria configurazione</a:t>
-            </a:r>
+              <a:t>PyPI</a:t>
+            </a:r>
+            <a:r>
+              <a:rPr lang="en-US" b="1" dirty="0">
+                <a:hlinkClick r:id="rId2"/>
+              </a:rPr>
+              <a:t> (Python Package Index)</a:t>
+            </a:r>
+            <a:endParaRPr lang="en-US" b="1" dirty="0"/>
+          </a:p>
+          <a:p>
+            <a:endParaRPr lang="en-US" dirty="0"/>
           </a:p>
         </p:txBody>
       </p:sp>
     </p:spTree>
     <p:extLst>
       <p:ext uri="{BB962C8B-B14F-4D97-AF65-F5344CB8AC3E}">
-        <p14:creationId xmlns:p14="http://schemas.microsoft.com/office/powerpoint/2010/main" val="3061154852"/>
+        <p14:creationId xmlns:p14="http://schemas.microsoft.com/office/powerpoint/2010/main" val="689915869"/>
       </p:ext>
     </p:extLst>
   </p:cSld>
@@ -4620,7 +4468,7 @@
           <p:cNvPr id="2" name="Title 1">
             <a:extLst>
               <a:ext uri="{FF2B5EF4-FFF2-40B4-BE49-F238E27FC236}">
-                <a16:creationId xmlns:a16="http://schemas.microsoft.com/office/drawing/2014/main" id="{65BE7D12-AA33-7C95-0F78-CD2328B1F26E}"/>
+                <a16:creationId xmlns:a16="http://schemas.microsoft.com/office/drawing/2014/main" id="{5B7F4919-26F3-6CD5-4424-1878568FBEF2}"/>
               </a:ext>
             </a:extLst>
           </p:cNvPr>
@@ -4640,7 +4488,121 @@
               <a:rPr lang="en-US" dirty="0" err="1"/>
               <a:t>venv</a:t>
             </a:r>
-            <a:endParaRPr lang="en-US" dirty="0"/>
+            <a:r>
+              <a:rPr lang="en-US" dirty="0"/>
+              <a:t>: </a:t>
+            </a:r>
+            <a:r>
+              <a:rPr lang="en-US" dirty="0" err="1"/>
+              <a:t>ambienti</a:t>
+            </a:r>
+            <a:r>
+              <a:rPr lang="en-US" dirty="0"/>
+              <a:t> </a:t>
+            </a:r>
+            <a:r>
+              <a:rPr lang="en-US" dirty="0" err="1"/>
+              <a:t>virtuali</a:t>
+            </a:r>
+            <a:r>
+              <a:rPr lang="en-US" dirty="0"/>
+              <a:t> Python</a:t>
+            </a:r>
+          </a:p>
+        </p:txBody>
+      </p:sp>
+      <p:sp>
+        <p:nvSpPr>
+          <p:cNvPr id="3" name="Content Placeholder 2">
+            <a:extLst>
+              <a:ext uri="{FF2B5EF4-FFF2-40B4-BE49-F238E27FC236}">
+                <a16:creationId xmlns:a16="http://schemas.microsoft.com/office/drawing/2014/main" id="{7DBD14B4-C920-6A74-E0D5-3FF79EF6DE1D}"/>
+              </a:ext>
+            </a:extLst>
+          </p:cNvPr>
+          <p:cNvSpPr>
+            <a:spLocks noGrp="1"/>
+          </p:cNvSpPr>
+          <p:nvPr>
+            <p:ph idx="1"/>
+          </p:nvPr>
+        </p:nvSpPr>
+        <p:spPr>
+          <a:xfrm>
+            <a:off x="838201" y="1825625"/>
+            <a:ext cx="4110318" cy="4351338"/>
+          </a:xfrm>
+        </p:spPr>
+        <p:txBody>
+          <a:bodyPr>
+            <a:normAutofit/>
+          </a:bodyPr>
+          <a:lstStyle/>
+          <a:p>
+            <a:pPr marL="0" indent="0">
+              <a:buNone/>
+            </a:pPr>
+            <a:r>
+              <a:rPr lang="it-IT" sz="1800" b="1" dirty="0"/>
+              <a:t>Problema</a:t>
+            </a:r>
+          </a:p>
+          <a:p>
+            <a:pPr marL="0" indent="0">
+              <a:buNone/>
+            </a:pPr>
+            <a:r>
+              <a:rPr lang="it-IT" sz="1800" dirty="0"/>
+              <a:t>Progetti diversi possono usare:</a:t>
+            </a:r>
+          </a:p>
+          <a:p>
+            <a:pPr marL="0" indent="0">
+              <a:buNone/>
+            </a:pPr>
+            <a:r>
+              <a:rPr lang="it-IT" sz="1800" dirty="0"/>
+              <a:t>	versioni diverse delle librerie </a:t>
+            </a:r>
+          </a:p>
+          <a:p>
+            <a:pPr marL="0" indent="0">
+              <a:buNone/>
+            </a:pPr>
+            <a:r>
+              <a:rPr lang="it-IT" sz="1800" dirty="0"/>
+              <a:t>	dipendenze incompatibili </a:t>
+            </a:r>
+          </a:p>
+          <a:p>
+            <a:pPr marL="0" indent="0">
+              <a:buNone/>
+            </a:pPr>
+            <a:endParaRPr lang="it-IT" sz="1800" dirty="0"/>
+          </a:p>
+          <a:p>
+            <a:pPr marL="0" indent="0">
+              <a:buNone/>
+            </a:pPr>
+            <a:r>
+              <a:rPr lang="it-IT" sz="1800" dirty="0"/>
+              <a:t>Esempio:</a:t>
+            </a:r>
+          </a:p>
+          <a:p>
+            <a:r>
+              <a:rPr lang="it-IT" sz="1800" dirty="0"/>
+              <a:t>Progetto A → Django 4 </a:t>
+            </a:r>
+          </a:p>
+          <a:p>
+            <a:r>
+              <a:rPr lang="it-IT" sz="1800" dirty="0"/>
+              <a:t>Progetto B → Django 5</a:t>
+            </a:r>
+          </a:p>
+          <a:p>
+            <a:endParaRPr lang="en-US" sz="1800" dirty="0"/>
           </a:p>
         </p:txBody>
       </p:sp>
@@ -4649,7 +4611,7 @@
           <p:cNvPr id="7" name="TextBox 6">
             <a:extLst>
               <a:ext uri="{FF2B5EF4-FFF2-40B4-BE49-F238E27FC236}">
-                <a16:creationId xmlns:a16="http://schemas.microsoft.com/office/drawing/2014/main" id="{0F9FC87B-6D3C-11F4-F587-9A6C5D4472D4}"/>
+                <a16:creationId xmlns:a16="http://schemas.microsoft.com/office/drawing/2014/main" id="{5838E58F-F3FF-F687-8899-F95C6504EAE0}"/>
               </a:ext>
             </a:extLst>
           </p:cNvPr>
@@ -4658,8 +4620,8 @@
         </p:nvSpPr>
         <p:spPr>
           <a:xfrm>
-            <a:off x="838200" y="1551819"/>
-            <a:ext cx="6096000" cy="1477328"/>
+            <a:off x="6221506" y="1825625"/>
+            <a:ext cx="5056094" cy="1754326"/>
           </a:xfrm>
           <a:prstGeom prst="rect">
             <a:avLst/>
@@ -4676,325 +4638,14 @@
               <a:buNone/>
             </a:pPr>
             <a:r>
-              <a:rPr lang="en-US" b="1" dirty="0" err="1"/>
-              <a:t>Creare</a:t>
-            </a:r>
-            <a:r>
-              <a:rPr lang="en-US" b="1" dirty="0"/>
-              <a:t> un </a:t>
-            </a:r>
-            <a:r>
-              <a:rPr lang="en-US" b="1" dirty="0" err="1"/>
-              <a:t>ambiente</a:t>
-            </a:r>
-            <a:r>
-              <a:rPr lang="en-US" b="1" dirty="0"/>
-              <a:t> </a:t>
-            </a:r>
-            <a:r>
-              <a:rPr lang="en-US" b="1" dirty="0" err="1"/>
-              <a:t>virtuale</a:t>
-            </a:r>
-            <a:endParaRPr lang="en-US" b="1" dirty="0"/>
+              <a:rPr lang="it-IT" b="1" dirty="0"/>
+              <a:t>Soluzione</a:t>
+            </a:r>
           </a:p>
           <a:p>
             <a:pPr>
               <a:buNone/>
             </a:pPr>
-            <a:r>
-              <a:rPr lang="en-US" b="1" dirty="0"/>
-              <a:t>Windows</a:t>
-            </a:r>
-          </a:p>
-          <a:p>
-            <a:pPr rtl="0">
-              <a:buNone/>
-            </a:pPr>
-            <a:r>
-              <a:rPr lang="en-US" dirty="0">
-                <a:latin typeface="Courier New" panose="02070309020205020404" pitchFamily="49" charset="0"/>
-              </a:rPr>
-              <a:t>python -m </a:t>
-            </a:r>
-            <a:r>
-              <a:rPr lang="en-US" dirty="0" err="1">
-                <a:latin typeface="Courier New" panose="02070309020205020404" pitchFamily="49" charset="0"/>
-              </a:rPr>
-              <a:t>venv</a:t>
-            </a:r>
-            <a:r>
-              <a:rPr lang="en-US" dirty="0">
-                <a:latin typeface="Courier New" panose="02070309020205020404" pitchFamily="49" charset="0"/>
-              </a:rPr>
-              <a:t> </a:t>
-            </a:r>
-            <a:r>
-              <a:rPr lang="en-US" dirty="0" err="1">
-                <a:latin typeface="Courier New" panose="02070309020205020404" pitchFamily="49" charset="0"/>
-              </a:rPr>
-              <a:t>venv</a:t>
-            </a:r>
-            <a:endParaRPr lang="en-US" dirty="0">
-              <a:latin typeface="Courier New" panose="02070309020205020404" pitchFamily="49" charset="0"/>
-            </a:endParaRPr>
-          </a:p>
-          <a:p>
-            <a:pPr>
-              <a:buNone/>
-            </a:pPr>
-            <a:r>
-              <a:rPr lang="en-US" b="1" dirty="0"/>
-              <a:t>Mac / Linux</a:t>
-            </a:r>
-          </a:p>
-          <a:p>
-            <a:pPr rtl="0">
-              <a:buNone/>
-            </a:pPr>
-            <a:r>
-              <a:rPr lang="en-US" dirty="0">
-                <a:latin typeface="Courier New" panose="02070309020205020404" pitchFamily="49" charset="0"/>
-              </a:rPr>
-              <a:t>python3 -m </a:t>
-            </a:r>
-            <a:r>
-              <a:rPr lang="en-US" dirty="0" err="1">
-                <a:latin typeface="Courier New" panose="02070309020205020404" pitchFamily="49" charset="0"/>
-              </a:rPr>
-              <a:t>venv</a:t>
-            </a:r>
-            <a:r>
-              <a:rPr lang="en-US" dirty="0">
-                <a:latin typeface="Courier New" panose="02070309020205020404" pitchFamily="49" charset="0"/>
-              </a:rPr>
-              <a:t> </a:t>
-            </a:r>
-            <a:r>
-              <a:rPr lang="en-US" dirty="0" err="1">
-                <a:latin typeface="Courier New" panose="02070309020205020404" pitchFamily="49" charset="0"/>
-              </a:rPr>
-              <a:t>venv</a:t>
-            </a:r>
-            <a:endParaRPr lang="en-US" dirty="0">
-              <a:latin typeface="Courier New" panose="02070309020205020404" pitchFamily="49" charset="0"/>
-            </a:endParaRPr>
-          </a:p>
-        </p:txBody>
-      </p:sp>
-      <p:sp>
-        <p:nvSpPr>
-          <p:cNvPr id="9" name="TextBox 8">
-            <a:extLst>
-              <a:ext uri="{FF2B5EF4-FFF2-40B4-BE49-F238E27FC236}">
-                <a16:creationId xmlns:a16="http://schemas.microsoft.com/office/drawing/2014/main" id="{95AF15A6-B6DC-A027-21D4-CF07EA9D109E}"/>
-              </a:ext>
-            </a:extLst>
-          </p:cNvPr>
-          <p:cNvSpPr txBox="1"/>
-          <p:nvPr/>
-        </p:nvSpPr>
-        <p:spPr>
-          <a:xfrm>
-            <a:off x="838200" y="3219253"/>
-            <a:ext cx="6096000" cy="1477328"/>
-          </a:xfrm>
-          <a:prstGeom prst="rect">
-            <a:avLst/>
-          </a:prstGeom>
-          <a:noFill/>
-        </p:spPr>
-        <p:txBody>
-          <a:bodyPr wrap="square">
-            <a:spAutoFit/>
-          </a:bodyPr>
-          <a:lstStyle/>
-          <a:p>
-            <a:pPr>
-              <a:buNone/>
-            </a:pPr>
-            <a:r>
-              <a:rPr lang="en-US" b="1" dirty="0" err="1"/>
-              <a:t>Attivare</a:t>
-            </a:r>
-            <a:r>
-              <a:rPr lang="en-US" b="1" dirty="0"/>
-              <a:t> </a:t>
-            </a:r>
-            <a:r>
-              <a:rPr lang="en-US" b="1" dirty="0" err="1"/>
-              <a:t>l’ambiente</a:t>
-            </a:r>
-            <a:endParaRPr lang="en-US" b="1" dirty="0"/>
-          </a:p>
-          <a:p>
-            <a:pPr>
-              <a:buNone/>
-            </a:pPr>
-            <a:r>
-              <a:rPr lang="en-US" b="1" dirty="0"/>
-              <a:t>Windows</a:t>
-            </a:r>
-          </a:p>
-          <a:p>
-            <a:pPr rtl="0">
-              <a:buNone/>
-            </a:pPr>
-            <a:r>
-              <a:rPr lang="en-US" dirty="0" err="1">
-                <a:latin typeface="Courier New" panose="02070309020205020404" pitchFamily="49" charset="0"/>
-              </a:rPr>
-              <a:t>venv</a:t>
-            </a:r>
-            <a:r>
-              <a:rPr lang="en-US" dirty="0">
-                <a:latin typeface="Courier New" panose="02070309020205020404" pitchFamily="49" charset="0"/>
-              </a:rPr>
-              <a:t>\Scripts\activate</a:t>
-            </a:r>
-          </a:p>
-          <a:p>
-            <a:pPr>
-              <a:buNone/>
-            </a:pPr>
-            <a:r>
-              <a:rPr lang="en-US" b="1" dirty="0"/>
-              <a:t>Mac / Linux</a:t>
-            </a:r>
-          </a:p>
-          <a:p>
-            <a:pPr rtl="0">
-              <a:buNone/>
-            </a:pPr>
-            <a:r>
-              <a:rPr lang="en-US" dirty="0">
-                <a:latin typeface="Courier New" panose="02070309020205020404" pitchFamily="49" charset="0"/>
-              </a:rPr>
-              <a:t>source </a:t>
-            </a:r>
-            <a:r>
-              <a:rPr lang="en-US" dirty="0" err="1">
-                <a:latin typeface="Courier New" panose="02070309020205020404" pitchFamily="49" charset="0"/>
-              </a:rPr>
-              <a:t>venv</a:t>
-            </a:r>
-            <a:r>
-              <a:rPr lang="en-US" dirty="0">
-                <a:latin typeface="Courier New" panose="02070309020205020404" pitchFamily="49" charset="0"/>
-              </a:rPr>
-              <a:t>/bin/activate</a:t>
-            </a:r>
-          </a:p>
-        </p:txBody>
-      </p:sp>
-      <p:sp>
-        <p:nvSpPr>
-          <p:cNvPr id="11" name="TextBox 10">
-            <a:extLst>
-              <a:ext uri="{FF2B5EF4-FFF2-40B4-BE49-F238E27FC236}">
-                <a16:creationId xmlns:a16="http://schemas.microsoft.com/office/drawing/2014/main" id="{DBFC8F4C-A4AE-C3C8-4EA2-B6829EA9F695}"/>
-              </a:ext>
-            </a:extLst>
-          </p:cNvPr>
-          <p:cNvSpPr txBox="1"/>
-          <p:nvPr/>
-        </p:nvSpPr>
-        <p:spPr>
-          <a:xfrm>
-            <a:off x="838200" y="4983015"/>
-            <a:ext cx="6096000" cy="646331"/>
-          </a:xfrm>
-          <a:prstGeom prst="rect">
-            <a:avLst/>
-          </a:prstGeom>
-          <a:noFill/>
-        </p:spPr>
-        <p:txBody>
-          <a:bodyPr wrap="square">
-            <a:spAutoFit/>
-          </a:bodyPr>
-          <a:lstStyle/>
-          <a:p>
-            <a:pPr>
-              <a:buNone/>
-            </a:pPr>
-            <a:r>
-              <a:rPr lang="en-US" b="1" dirty="0" err="1"/>
-              <a:t>Disattivare</a:t>
-            </a:r>
-            <a:r>
-              <a:rPr lang="en-US" b="1" dirty="0"/>
-              <a:t> </a:t>
-            </a:r>
-            <a:r>
-              <a:rPr lang="en-US" b="1" dirty="0" err="1"/>
-              <a:t>l’ambiente</a:t>
-            </a:r>
-            <a:endParaRPr lang="en-US" b="1" dirty="0"/>
-          </a:p>
-          <a:p>
-            <a:pPr rtl="0">
-              <a:buNone/>
-            </a:pPr>
-            <a:r>
-              <a:rPr lang="en-US" dirty="0">
-                <a:latin typeface="Courier New" panose="02070309020205020404" pitchFamily="49" charset="0"/>
-              </a:rPr>
-              <a:t>deactivate</a:t>
-            </a:r>
-          </a:p>
-        </p:txBody>
-      </p:sp>
-      <p:sp>
-        <p:nvSpPr>
-          <p:cNvPr id="13" name="TextBox 12">
-            <a:extLst>
-              <a:ext uri="{FF2B5EF4-FFF2-40B4-BE49-F238E27FC236}">
-                <a16:creationId xmlns:a16="http://schemas.microsoft.com/office/drawing/2014/main" id="{71238293-F274-D725-7903-D35D8FD4D2C0}"/>
-              </a:ext>
-            </a:extLst>
-          </p:cNvPr>
-          <p:cNvSpPr txBox="1"/>
-          <p:nvPr/>
-        </p:nvSpPr>
-        <p:spPr>
-          <a:xfrm>
-            <a:off x="6096000" y="1536358"/>
-            <a:ext cx="6096000" cy="1200329"/>
-          </a:xfrm>
-          <a:prstGeom prst="rect">
-            <a:avLst/>
-          </a:prstGeom>
-          <a:noFill/>
-        </p:spPr>
-        <p:txBody>
-          <a:bodyPr wrap="square">
-            <a:spAutoFit/>
-          </a:bodyPr>
-          <a:lstStyle/>
-          <a:p>
-            <a:pPr>
-              <a:buNone/>
-            </a:pPr>
-            <a:r>
-              <a:rPr lang="it-IT" b="1" dirty="0"/>
-              <a:t>Best Practice</a:t>
-            </a:r>
-          </a:p>
-          <a:p>
-            <a:pPr>
-              <a:buNone/>
-            </a:pPr>
-            <a:r>
-              <a:rPr lang="it-IT" dirty="0"/>
-              <a:t>✅ Un ambiente virtuale per ogni progetto</a:t>
-            </a:r>
-            <a:br>
-              <a:rPr lang="it-IT" dirty="0"/>
-            </a:br>
-            <a:r>
-              <a:rPr lang="it-IT" dirty="0"/>
-              <a:t>✅ Non condividere cartella </a:t>
-            </a:r>
             <a:r>
               <a:rPr lang="it-IT" dirty="0">
                 <a:latin typeface="Courier New" panose="02070309020205020404" pitchFamily="49" charset="0"/>
@@ -5003,29 +4654,54 @@
             </a:r>
             <a:r>
               <a:rPr lang="it-IT" dirty="0"/>
-              <a:t> su Git</a:t>
-            </a:r>
-            <a:br>
+              <a:t> crea un ambiente isolato per ogni progetto.</a:t>
+            </a:r>
+          </a:p>
+          <a:p>
+            <a:pPr>
+              <a:buNone/>
+            </a:pPr>
+            <a:r>
               <a:rPr lang="it-IT" dirty="0"/>
-            </a:br>
+              <a:t>Ogni progetto avrà:</a:t>
+            </a:r>
+          </a:p>
+          <a:p>
+            <a:pPr>
+              <a:buFont typeface="Arial" panose="020B0604020202020204" pitchFamily="34" charset="0"/>
+              <a:buChar char="•"/>
+            </a:pPr>
             <a:r>
               <a:rPr lang="it-IT" dirty="0"/>
-              <a:t>✅ Salvare sempre </a:t>
-            </a:r>
-            <a:r>
-              <a:rPr lang="it-IT" dirty="0">
-                <a:latin typeface="Courier New" panose="02070309020205020404" pitchFamily="49" charset="0"/>
-              </a:rPr>
-              <a:t>requirements.txt</a:t>
-            </a:r>
-            <a:endParaRPr lang="it-IT" dirty="0"/>
+              <a:t>le proprie librerie </a:t>
+            </a:r>
+          </a:p>
+          <a:p>
+            <a:pPr>
+              <a:buFont typeface="Arial" panose="020B0604020202020204" pitchFamily="34" charset="0"/>
+              <a:buChar char="•"/>
+            </a:pPr>
+            <a:r>
+              <a:rPr lang="it-IT" dirty="0"/>
+              <a:t>le proprie versioni </a:t>
+            </a:r>
+          </a:p>
+          <a:p>
+            <a:pPr>
+              <a:buFont typeface="Arial" panose="020B0604020202020204" pitchFamily="34" charset="0"/>
+              <a:buChar char="•"/>
+            </a:pPr>
+            <a:r>
+              <a:rPr lang="it-IT" dirty="0"/>
+              <a:t>la propria configurazione</a:t>
+            </a:r>
           </a:p>
         </p:txBody>
       </p:sp>
     </p:spTree>
     <p:extLst>
       <p:ext uri="{BB962C8B-B14F-4D97-AF65-F5344CB8AC3E}">
-        <p14:creationId xmlns:p14="http://schemas.microsoft.com/office/powerpoint/2010/main" val="2660867481"/>
+        <p14:creationId xmlns:p14="http://schemas.microsoft.com/office/powerpoint/2010/main" val="3061154852"/>
       </p:ext>
     </p:extLst>
   </p:cSld>
@@ -5057,7 +4733,7 @@
           <p:cNvPr id="2" name="Title 1">
             <a:extLst>
               <a:ext uri="{FF2B5EF4-FFF2-40B4-BE49-F238E27FC236}">
-                <a16:creationId xmlns:a16="http://schemas.microsoft.com/office/drawing/2014/main" id="{CBD55CF8-154F-3CC8-B248-7AC58219C3A5}"/>
+                <a16:creationId xmlns:a16="http://schemas.microsoft.com/office/drawing/2014/main" id="{65BE7D12-AA33-7C95-0F78-CD2328B1F26E}"/>
               </a:ext>
             </a:extLst>
           </p:cNvPr>
@@ -5075,7 +4751,7 @@
           <a:p>
             <a:r>
               <a:rPr lang="en-US" dirty="0" err="1"/>
-              <a:t>github</a:t>
+              <a:t>venv</a:t>
             </a:r>
             <a:endParaRPr lang="en-US" dirty="0"/>
           </a:p>
@@ -5083,39 +4759,386 @@
       </p:sp>
       <p:sp>
         <p:nvSpPr>
-          <p:cNvPr id="4" name="Content Placeholder 3">
-            <a:extLst>
-              <a:ext uri="{FF2B5EF4-FFF2-40B4-BE49-F238E27FC236}">
-                <a16:creationId xmlns:a16="http://schemas.microsoft.com/office/drawing/2014/main" id="{0B7B542D-4E32-7EDC-894F-B82A11C6EA85}"/>
-              </a:ext>
-            </a:extLst>
-          </p:cNvPr>
-          <p:cNvSpPr>
-            <a:spLocks noGrp="1"/>
-          </p:cNvSpPr>
-          <p:nvPr>
-            <p:ph idx="1"/>
-          </p:nvPr>
-        </p:nvSpPr>
-        <p:spPr/>
-        <p:txBody>
-          <a:bodyPr/>
-          <a:lstStyle/>
-          <a:p>
-            <a:pPr marL="0" indent="0">
+          <p:cNvPr id="7" name="TextBox 6">
+            <a:extLst>
+              <a:ext uri="{FF2B5EF4-FFF2-40B4-BE49-F238E27FC236}">
+                <a16:creationId xmlns:a16="http://schemas.microsoft.com/office/drawing/2014/main" id="{0F9FC87B-6D3C-11F4-F587-9A6C5D4472D4}"/>
+              </a:ext>
+            </a:extLst>
+          </p:cNvPr>
+          <p:cNvSpPr txBox="1"/>
+          <p:nvPr/>
+        </p:nvSpPr>
+        <p:spPr>
+          <a:xfrm>
+            <a:off x="838200" y="1551819"/>
+            <a:ext cx="6096000" cy="1477328"/>
+          </a:xfrm>
+          <a:prstGeom prst="rect">
+            <a:avLst/>
+          </a:prstGeom>
+          <a:noFill/>
+        </p:spPr>
+        <p:txBody>
+          <a:bodyPr wrap="square">
+            <a:spAutoFit/>
+          </a:bodyPr>
+          <a:lstStyle/>
+          <a:p>
+            <a:pPr>
               <a:buNone/>
             </a:pPr>
             <a:r>
-              <a:rPr lang="en-US" dirty="0"/>
-              <a:t>https://github.com/dipialx/Corso-Python</a:t>
-            </a:r>
+              <a:rPr lang="en-US" b="1" dirty="0" err="1"/>
+              <a:t>Creare</a:t>
+            </a:r>
+            <a:r>
+              <a:rPr lang="en-US" b="1" dirty="0"/>
+              <a:t> un </a:t>
+            </a:r>
+            <a:r>
+              <a:rPr lang="en-US" b="1" dirty="0" err="1"/>
+              <a:t>ambiente</a:t>
+            </a:r>
+            <a:r>
+              <a:rPr lang="en-US" b="1" dirty="0"/>
+              <a:t> </a:t>
+            </a:r>
+            <a:r>
+              <a:rPr lang="en-US" b="1" dirty="0" err="1"/>
+              <a:t>virtuale</a:t>
+            </a:r>
+            <a:endParaRPr lang="en-US" b="1" dirty="0"/>
+          </a:p>
+          <a:p>
+            <a:pPr>
+              <a:buNone/>
+            </a:pPr>
+            <a:r>
+              <a:rPr lang="en-US" b="1" dirty="0"/>
+              <a:t>Windows</a:t>
+            </a:r>
+          </a:p>
+          <a:p>
+            <a:pPr rtl="0">
+              <a:buNone/>
+            </a:pPr>
+            <a:r>
+              <a:rPr lang="en-US" dirty="0">
+                <a:latin typeface="Courier New" panose="02070309020205020404" pitchFamily="49" charset="0"/>
+              </a:rPr>
+              <a:t>python -m </a:t>
+            </a:r>
+            <a:r>
+              <a:rPr lang="en-US" dirty="0" err="1">
+                <a:latin typeface="Courier New" panose="02070309020205020404" pitchFamily="49" charset="0"/>
+              </a:rPr>
+              <a:t>venv</a:t>
+            </a:r>
+            <a:r>
+              <a:rPr lang="en-US" dirty="0">
+                <a:latin typeface="Courier New" panose="02070309020205020404" pitchFamily="49" charset="0"/>
+              </a:rPr>
+              <a:t> </a:t>
+            </a:r>
+            <a:r>
+              <a:rPr lang="en-US" dirty="0" err="1">
+                <a:latin typeface="Courier New" panose="02070309020205020404" pitchFamily="49" charset="0"/>
+              </a:rPr>
+              <a:t>venv</a:t>
+            </a:r>
+            <a:endParaRPr lang="en-US" dirty="0">
+              <a:latin typeface="Courier New" panose="02070309020205020404" pitchFamily="49" charset="0"/>
+            </a:endParaRPr>
+          </a:p>
+          <a:p>
+            <a:pPr>
+              <a:buNone/>
+            </a:pPr>
+            <a:r>
+              <a:rPr lang="en-US" b="1" dirty="0"/>
+              <a:t>Mac / Linux</a:t>
+            </a:r>
+          </a:p>
+          <a:p>
+            <a:pPr rtl="0">
+              <a:buNone/>
+            </a:pPr>
+            <a:r>
+              <a:rPr lang="en-US" dirty="0">
+                <a:latin typeface="Courier New" panose="02070309020205020404" pitchFamily="49" charset="0"/>
+              </a:rPr>
+              <a:t>python3 -m </a:t>
+            </a:r>
+            <a:r>
+              <a:rPr lang="en-US" dirty="0" err="1">
+                <a:latin typeface="Courier New" panose="02070309020205020404" pitchFamily="49" charset="0"/>
+              </a:rPr>
+              <a:t>venv</a:t>
+            </a:r>
+            <a:r>
+              <a:rPr lang="en-US" dirty="0">
+                <a:latin typeface="Courier New" panose="02070309020205020404" pitchFamily="49" charset="0"/>
+              </a:rPr>
+              <a:t> </a:t>
+            </a:r>
+            <a:r>
+              <a:rPr lang="en-US" dirty="0" err="1">
+                <a:latin typeface="Courier New" panose="02070309020205020404" pitchFamily="49" charset="0"/>
+              </a:rPr>
+              <a:t>venv</a:t>
+            </a:r>
+            <a:endParaRPr lang="en-US" dirty="0">
+              <a:latin typeface="Courier New" panose="02070309020205020404" pitchFamily="49" charset="0"/>
+            </a:endParaRPr>
+          </a:p>
+        </p:txBody>
+      </p:sp>
+      <p:sp>
+        <p:nvSpPr>
+          <p:cNvPr id="9" name="TextBox 8">
+            <a:extLst>
+              <a:ext uri="{FF2B5EF4-FFF2-40B4-BE49-F238E27FC236}">
+                <a16:creationId xmlns:a16="http://schemas.microsoft.com/office/drawing/2014/main" id="{95AF15A6-B6DC-A027-21D4-CF07EA9D109E}"/>
+              </a:ext>
+            </a:extLst>
+          </p:cNvPr>
+          <p:cNvSpPr txBox="1"/>
+          <p:nvPr/>
+        </p:nvSpPr>
+        <p:spPr>
+          <a:xfrm>
+            <a:off x="838200" y="3219253"/>
+            <a:ext cx="6096000" cy="1477328"/>
+          </a:xfrm>
+          <a:prstGeom prst="rect">
+            <a:avLst/>
+          </a:prstGeom>
+          <a:noFill/>
+        </p:spPr>
+        <p:txBody>
+          <a:bodyPr wrap="square">
+            <a:spAutoFit/>
+          </a:bodyPr>
+          <a:lstStyle/>
+          <a:p>
+            <a:pPr>
+              <a:buNone/>
+            </a:pPr>
+            <a:r>
+              <a:rPr lang="en-US" b="1" dirty="0" err="1"/>
+              <a:t>Attivare</a:t>
+            </a:r>
+            <a:r>
+              <a:rPr lang="en-US" b="1" dirty="0"/>
+              <a:t> </a:t>
+            </a:r>
+            <a:r>
+              <a:rPr lang="en-US" b="1" dirty="0" err="1"/>
+              <a:t>l’ambiente</a:t>
+            </a:r>
+            <a:endParaRPr lang="en-US" b="1" dirty="0"/>
+          </a:p>
+          <a:p>
+            <a:pPr>
+              <a:buNone/>
+            </a:pPr>
+            <a:r>
+              <a:rPr lang="en-US" b="1" dirty="0"/>
+              <a:t>Windows</a:t>
+            </a:r>
+          </a:p>
+          <a:p>
+            <a:pPr rtl="0">
+              <a:buNone/>
+            </a:pPr>
+            <a:r>
+              <a:rPr lang="en-US" dirty="0" err="1">
+                <a:latin typeface="Courier New" panose="02070309020205020404" pitchFamily="49" charset="0"/>
+              </a:rPr>
+              <a:t>venv</a:t>
+            </a:r>
+            <a:r>
+              <a:rPr lang="en-US" dirty="0">
+                <a:latin typeface="Courier New" panose="02070309020205020404" pitchFamily="49" charset="0"/>
+              </a:rPr>
+              <a:t>\Scripts\activate</a:t>
+            </a:r>
+          </a:p>
+          <a:p>
+            <a:pPr>
+              <a:buNone/>
+            </a:pPr>
+            <a:r>
+              <a:rPr lang="en-US" b="1" dirty="0"/>
+              <a:t>Mac / Linux</a:t>
+            </a:r>
+          </a:p>
+          <a:p>
+            <a:pPr rtl="0">
+              <a:buNone/>
+            </a:pPr>
+            <a:r>
+              <a:rPr lang="en-US" dirty="0">
+                <a:latin typeface="Courier New" panose="02070309020205020404" pitchFamily="49" charset="0"/>
+              </a:rPr>
+              <a:t>source </a:t>
+            </a:r>
+            <a:r>
+              <a:rPr lang="en-US" dirty="0" err="1">
+                <a:latin typeface="Courier New" panose="02070309020205020404" pitchFamily="49" charset="0"/>
+              </a:rPr>
+              <a:t>venv</a:t>
+            </a:r>
+            <a:r>
+              <a:rPr lang="en-US" dirty="0">
+                <a:latin typeface="Courier New" panose="02070309020205020404" pitchFamily="49" charset="0"/>
+              </a:rPr>
+              <a:t>/bin/activate</a:t>
+            </a:r>
+          </a:p>
+        </p:txBody>
+      </p:sp>
+      <p:sp>
+        <p:nvSpPr>
+          <p:cNvPr id="11" name="TextBox 10">
+            <a:extLst>
+              <a:ext uri="{FF2B5EF4-FFF2-40B4-BE49-F238E27FC236}">
+                <a16:creationId xmlns:a16="http://schemas.microsoft.com/office/drawing/2014/main" id="{DBFC8F4C-A4AE-C3C8-4EA2-B6829EA9F695}"/>
+              </a:ext>
+            </a:extLst>
+          </p:cNvPr>
+          <p:cNvSpPr txBox="1"/>
+          <p:nvPr/>
+        </p:nvSpPr>
+        <p:spPr>
+          <a:xfrm>
+            <a:off x="838200" y="4983015"/>
+            <a:ext cx="6096000" cy="646331"/>
+          </a:xfrm>
+          <a:prstGeom prst="rect">
+            <a:avLst/>
+          </a:prstGeom>
+          <a:noFill/>
+        </p:spPr>
+        <p:txBody>
+          <a:bodyPr wrap="square">
+            <a:spAutoFit/>
+          </a:bodyPr>
+          <a:lstStyle/>
+          <a:p>
+            <a:pPr>
+              <a:buNone/>
+            </a:pPr>
+            <a:r>
+              <a:rPr lang="en-US" b="1" dirty="0" err="1"/>
+              <a:t>Disattivare</a:t>
+            </a:r>
+            <a:r>
+              <a:rPr lang="en-US" b="1" dirty="0"/>
+              <a:t> </a:t>
+            </a:r>
+            <a:r>
+              <a:rPr lang="en-US" b="1" dirty="0" err="1"/>
+              <a:t>l’ambiente</a:t>
+            </a:r>
+            <a:endParaRPr lang="en-US" b="1" dirty="0"/>
+          </a:p>
+          <a:p>
+            <a:pPr rtl="0">
+              <a:buNone/>
+            </a:pPr>
+            <a:r>
+              <a:rPr lang="en-US" dirty="0">
+                <a:latin typeface="Courier New" panose="02070309020205020404" pitchFamily="49" charset="0"/>
+              </a:rPr>
+              <a:t>deactivate</a:t>
+            </a:r>
+          </a:p>
+        </p:txBody>
+      </p:sp>
+      <p:sp>
+        <p:nvSpPr>
+          <p:cNvPr id="13" name="TextBox 12">
+            <a:extLst>
+              <a:ext uri="{FF2B5EF4-FFF2-40B4-BE49-F238E27FC236}">
+                <a16:creationId xmlns:a16="http://schemas.microsoft.com/office/drawing/2014/main" id="{71238293-F274-D725-7903-D35D8FD4D2C0}"/>
+              </a:ext>
+            </a:extLst>
+          </p:cNvPr>
+          <p:cNvSpPr txBox="1"/>
+          <p:nvPr/>
+        </p:nvSpPr>
+        <p:spPr>
+          <a:xfrm>
+            <a:off x="6096000" y="1536358"/>
+            <a:ext cx="6096000" cy="1200329"/>
+          </a:xfrm>
+          <a:prstGeom prst="rect">
+            <a:avLst/>
+          </a:prstGeom>
+          <a:noFill/>
+        </p:spPr>
+        <p:txBody>
+          <a:bodyPr wrap="square">
+            <a:spAutoFit/>
+          </a:bodyPr>
+          <a:lstStyle/>
+          <a:p>
+            <a:pPr>
+              <a:buNone/>
+            </a:pPr>
+            <a:r>
+              <a:rPr lang="it-IT" b="1" dirty="0"/>
+              <a:t>Best Practice</a:t>
+            </a:r>
+          </a:p>
+          <a:p>
+            <a:pPr>
+              <a:buNone/>
+            </a:pPr>
+            <a:r>
+              <a:rPr lang="it-IT" dirty="0"/>
+              <a:t>✅ Un ambiente virtuale per ogni progetto</a:t>
+            </a:r>
+            <a:br>
+              <a:rPr lang="it-IT" dirty="0"/>
+            </a:br>
+            <a:r>
+              <a:rPr lang="it-IT" dirty="0"/>
+              <a:t>✅ Non condividere cartella </a:t>
+            </a:r>
+            <a:r>
+              <a:rPr lang="it-IT" dirty="0">
+                <a:latin typeface="Courier New" panose="02070309020205020404" pitchFamily="49" charset="0"/>
+              </a:rPr>
+              <a:t>venv</a:t>
+            </a:r>
+            <a:r>
+              <a:rPr lang="it-IT" dirty="0"/>
+              <a:t> su Git</a:t>
+            </a:r>
+            <a:br>
+              <a:rPr lang="it-IT" dirty="0"/>
+            </a:br>
+            <a:r>
+              <a:rPr lang="it-IT" dirty="0"/>
+              <a:t>✅ Salvare sempre </a:t>
+            </a:r>
+            <a:r>
+              <a:rPr lang="it-IT" dirty="0">
+                <a:latin typeface="Courier New" panose="02070309020205020404" pitchFamily="49" charset="0"/>
+              </a:rPr>
+              <a:t>requirements.txt</a:t>
+            </a:r>
+            <a:endParaRPr lang="it-IT" dirty="0"/>
           </a:p>
         </p:txBody>
       </p:sp>
     </p:spTree>
     <p:extLst>
       <p:ext uri="{BB962C8B-B14F-4D97-AF65-F5344CB8AC3E}">
-        <p14:creationId xmlns:p14="http://schemas.microsoft.com/office/powerpoint/2010/main" val="2312129349"/>
+        <p14:creationId xmlns:p14="http://schemas.microsoft.com/office/powerpoint/2010/main" val="2660867481"/>
       </p:ext>
     </p:extLst>
   </p:cSld>
